--- a/gyeongsan/GSJOB_1교시_AI활용법.pptx
+++ b/gyeongsan/GSJOB_1교시_AI활용법.pptx
@@ -3126,7 +3126,7 @@
             <a:avLst/>
           </a:prstGeom>
           <a:solidFill>
-            <a:srgbClr val="F1F4FC"/>
+            <a:srgbClr val="F1F7F5"/>
           </a:solidFill>
           <a:ln>
             <a:noFill/>
@@ -3186,7 +3186,7 @@
             <a:avLst/>
           </a:prstGeom>
           <a:solidFill>
-            <a:srgbClr val="F6F6F9"/>
+            <a:srgbClr val="F6F7F9"/>
           </a:solidFill>
           <a:ln>
             <a:noFill/>
@@ -3216,7 +3216,7 @@
             <a:avLst/>
           </a:prstGeom>
           <a:solidFill>
-            <a:srgbClr val="E8E9F0"/>
+            <a:srgbClr val="E8EBF0"/>
           </a:solidFill>
           <a:ln>
             <a:noFill/>
@@ -3246,7 +3246,7 @@
             <a:avLst/>
           </a:prstGeom>
           <a:solidFill>
-            <a:srgbClr val="EEF2FB"/>
+            <a:srgbClr val="EEF5F2"/>
           </a:solidFill>
           <a:ln>
             <a:noFill/>
@@ -3306,7 +3306,7 @@
             <a:avLst/>
           </a:prstGeom>
           <a:solidFill>
-            <a:srgbClr val="EDEDF3"/>
+            <a:srgbClr val="EDEFF3"/>
           </a:solidFill>
           <a:ln>
             <a:noFill/>
@@ -3336,7 +3336,7 @@
             <a:avLst/>
           </a:prstGeom>
           <a:solidFill>
-            <a:srgbClr val="E2E9F9"/>
+            <a:srgbClr val="E1EEE9"/>
           </a:solidFill>
           <a:ln>
             <a:noFill/>
@@ -3366,7 +3366,7 @@
             <a:avLst/>
           </a:prstGeom>
           <a:solidFill>
-            <a:srgbClr val="E8E9F0"/>
+            <a:srgbClr val="E8EBF0"/>
           </a:solidFill>
           <a:ln>
             <a:noFill/>
@@ -3396,7 +3396,7 @@
             <a:avLst/>
           </a:prstGeom>
           <a:solidFill>
-            <a:srgbClr val="1E2A6E"/>
+            <a:srgbClr val="1E3E69"/>
           </a:solidFill>
           <a:ln>
             <a:noFill/>
@@ -3441,7 +3441,7 @@
             <a:r>
               <a:rPr sz="2400" b="1" spc="120">
                 <a:solidFill>
-                  <a:srgbClr val="2457D6"/>
+                  <a:srgbClr val="1E7F5B"/>
                 </a:solidFill>
                 <a:latin typeface="Pretendard"/>
                 <a:ea typeface="Pretendard"/>
@@ -3482,7 +3482,7 @@
             <a:r>
               <a:rPr sz="8100" b="1" spc="-302">
                 <a:solidFill>
-                  <a:srgbClr val="1E2A6E"/>
+                  <a:srgbClr val="1E3E69"/>
                 </a:solidFill>
                 <a:latin typeface="Pretendard"/>
                 <a:ea typeface="Pretendard"/>
@@ -3500,7 +3500,7 @@
             <a:r>
               <a:rPr sz="8100" b="1" spc="-302">
                 <a:solidFill>
-                  <a:srgbClr val="1E2A6E"/>
+                  <a:srgbClr val="1E3E69"/>
                 </a:solidFill>
                 <a:latin typeface="Pretendard"/>
                 <a:ea typeface="Pretendard"/>
@@ -3644,7 +3644,7 @@
             <a:avLst/>
           </a:prstGeom>
           <a:solidFill>
-            <a:srgbClr val="F4F6FC"/>
+            <a:srgbClr val="F3F8F6"/>
           </a:solidFill>
           <a:ln>
             <a:noFill/>
@@ -3674,7 +3674,7 @@
             <a:avLst/>
           </a:prstGeom>
           <a:solidFill>
-            <a:srgbClr val="F6F6F9"/>
+            <a:srgbClr val="F6F7F9"/>
           </a:solidFill>
           <a:ln>
             <a:noFill/>
@@ -3704,7 +3704,7 @@
             <a:avLst/>
           </a:prstGeom>
           <a:solidFill>
-            <a:srgbClr val="1E2A6E"/>
+            <a:srgbClr val="1E3E69"/>
           </a:solidFill>
           <a:ln>
             <a:noFill/>
@@ -3749,7 +3749,7 @@
             <a:r>
               <a:rPr sz="2400" b="1">
                 <a:solidFill>
-                  <a:srgbClr val="2457D6"/>
+                  <a:srgbClr val="1E7F5B"/>
                 </a:solidFill>
                 <a:latin typeface="Pretendard"/>
                 <a:ea typeface="Pretendard"/>
@@ -3790,7 +3790,7 @@
             <a:r>
               <a:rPr sz="6600" b="1">
                 <a:solidFill>
-                  <a:srgbClr val="1E2A6E"/>
+                  <a:srgbClr val="1E3E69"/>
                 </a:solidFill>
                 <a:latin typeface="Pretendard"/>
                 <a:ea typeface="Pretendard"/>
@@ -3857,7 +3857,7 @@
             <a:avLst/>
           </a:prstGeom>
           <a:solidFill>
-            <a:srgbClr val="DEE3F0"/>
+            <a:srgbClr val="D8E1EE"/>
           </a:solidFill>
           <a:ln>
             <a:noFill/>
@@ -3987,7 +3987,7 @@
             <a:avLst/>
           </a:prstGeom>
           <a:solidFill>
-            <a:srgbClr val="F4F6FC"/>
+            <a:srgbClr val="F3F8F6"/>
           </a:solidFill>
           <a:ln>
             <a:noFill/>
@@ -4047,7 +4047,7 @@
             <a:avLst/>
           </a:prstGeom>
           <a:solidFill>
-            <a:srgbClr val="F8F8FA"/>
+            <a:srgbClr val="F8F9FA"/>
           </a:solidFill>
           <a:ln>
             <a:noFill/>
@@ -4092,7 +4092,7 @@
             <a:r>
               <a:rPr sz="1950" b="1" spc="160">
                 <a:solidFill>
-                  <a:srgbClr val="2457D6"/>
+                  <a:srgbClr val="1E7F5B"/>
                 </a:solidFill>
                 <a:latin typeface="Pretendard"/>
                 <a:ea typeface="Pretendard"/>
@@ -4133,7 +4133,7 @@
             <a:r>
               <a:rPr sz="5100" b="1">
                 <a:solidFill>
-                  <a:srgbClr val="1E2A6E"/>
+                  <a:srgbClr val="1E3E69"/>
                 </a:solidFill>
                 <a:latin typeface="Pretendard"/>
                 <a:ea typeface="Pretendard"/>
@@ -4159,7 +4159,7 @@
             <a:avLst/>
           </a:prstGeom>
           <a:solidFill>
-            <a:srgbClr val="1E2A6E"/>
+            <a:srgbClr val="1E3E69"/>
           </a:solidFill>
           <a:ln>
             <a:noFill/>
@@ -4191,11 +4191,11 @@
             </a:avLst>
           </a:prstGeom>
           <a:solidFill>
-            <a:srgbClr val="F6F8FD"/>
+            <a:srgbClr val="F4F7FA"/>
           </a:solidFill>
           <a:ln w="9525">
             <a:solidFill>
-              <a:srgbClr val="DEE3F0"/>
+              <a:srgbClr val="D8E1EE"/>
             </a:solidFill>
           </a:ln>
           <a:effectLst/>
@@ -4223,7 +4223,7 @@
             <a:avLst/>
           </a:prstGeom>
           <a:solidFill>
-            <a:srgbClr val="2457D6"/>
+            <a:srgbClr val="1E7F5B"/>
           </a:solidFill>
           <a:ln>
             <a:noFill/>
@@ -4309,7 +4309,7 @@
             <a:r>
               <a:rPr sz="3150" b="1">
                 <a:solidFill>
-                  <a:srgbClr val="1E2A6E"/>
+                  <a:srgbClr val="1E3E69"/>
                 </a:solidFill>
                 <a:latin typeface="Pretendard"/>
                 <a:ea typeface="Pretendard"/>
@@ -4376,11 +4376,11 @@
             </a:avLst>
           </a:prstGeom>
           <a:solidFill>
-            <a:srgbClr val="F6F8FD"/>
+            <a:srgbClr val="F4F7FA"/>
           </a:solidFill>
           <a:ln w="9525">
             <a:solidFill>
-              <a:srgbClr val="DEE3F0"/>
+              <a:srgbClr val="D8E1EE"/>
             </a:solidFill>
           </a:ln>
           <a:effectLst/>
@@ -4408,7 +4408,7 @@
             <a:avLst/>
           </a:prstGeom>
           <a:solidFill>
-            <a:srgbClr val="2457D6"/>
+            <a:srgbClr val="1E7F5B"/>
           </a:solidFill>
           <a:ln>
             <a:noFill/>
@@ -4494,7 +4494,7 @@
             <a:r>
               <a:rPr sz="3150" b="1">
                 <a:solidFill>
-                  <a:srgbClr val="1E2A6E"/>
+                  <a:srgbClr val="1E3E69"/>
                 </a:solidFill>
                 <a:latin typeface="Pretendard"/>
                 <a:ea typeface="Pretendard"/>
@@ -4561,11 +4561,11 @@
             </a:avLst>
           </a:prstGeom>
           <a:solidFill>
-            <a:srgbClr val="F6F8FD"/>
+            <a:srgbClr val="F4F7FA"/>
           </a:solidFill>
           <a:ln w="9525">
             <a:solidFill>
-              <a:srgbClr val="DEE3F0"/>
+              <a:srgbClr val="D8E1EE"/>
             </a:solidFill>
           </a:ln>
           <a:effectLst/>
@@ -4593,7 +4593,7 @@
             <a:avLst/>
           </a:prstGeom>
           <a:solidFill>
-            <a:srgbClr val="2457D6"/>
+            <a:srgbClr val="1E7F5B"/>
           </a:solidFill>
           <a:ln>
             <a:noFill/>
@@ -4679,7 +4679,7 @@
             <a:r>
               <a:rPr sz="3150" b="1">
                 <a:solidFill>
-                  <a:srgbClr val="1E2A6E"/>
+                  <a:srgbClr val="1E3E69"/>
                 </a:solidFill>
                 <a:latin typeface="Pretendard"/>
                 <a:ea typeface="Pretendard"/>
@@ -4744,7 +4744,7 @@
             <a:avLst/>
           </a:prstGeom>
           <a:solidFill>
-            <a:srgbClr val="DEE3F0"/>
+            <a:srgbClr val="D8E1EE"/>
           </a:solidFill>
           <a:ln>
             <a:noFill/>
@@ -4874,7 +4874,7 @@
             <a:avLst/>
           </a:prstGeom>
           <a:solidFill>
-            <a:srgbClr val="F4F6FC"/>
+            <a:srgbClr val="F3F8F6"/>
           </a:solidFill>
           <a:ln>
             <a:noFill/>
@@ -4934,7 +4934,7 @@
             <a:avLst/>
           </a:prstGeom>
           <a:solidFill>
-            <a:srgbClr val="F8F8FA"/>
+            <a:srgbClr val="F8F9FA"/>
           </a:solidFill>
           <a:ln>
             <a:noFill/>
@@ -4979,7 +4979,7 @@
             <a:r>
               <a:rPr sz="1950" b="1" spc="160">
                 <a:solidFill>
-                  <a:srgbClr val="2457D6"/>
+                  <a:srgbClr val="1E7F5B"/>
                 </a:solidFill>
                 <a:latin typeface="Pretendard"/>
                 <a:ea typeface="Pretendard"/>
@@ -5020,7 +5020,7 @@
             <a:r>
               <a:rPr sz="5100" b="1">
                 <a:solidFill>
-                  <a:srgbClr val="1E2A6E"/>
+                  <a:srgbClr val="1E3E69"/>
                 </a:solidFill>
                 <a:latin typeface="Pretendard"/>
                 <a:ea typeface="Pretendard"/>
@@ -5046,7 +5046,7 @@
             <a:avLst/>
           </a:prstGeom>
           <a:solidFill>
-            <a:srgbClr val="1E2A6E"/>
+            <a:srgbClr val="1E3E69"/>
           </a:solidFill>
           <a:ln>
             <a:noFill/>
@@ -5119,11 +5119,11 @@
             </a:avLst>
           </a:prstGeom>
           <a:solidFill>
-            <a:srgbClr val="F6F8FD"/>
+            <a:srgbClr val="F4F7FA"/>
           </a:solidFill>
           <a:ln w="9525">
             <a:solidFill>
-              <a:srgbClr val="DEE3F0"/>
+              <a:srgbClr val="D8E1EE"/>
             </a:solidFill>
           </a:ln>
           <a:effectLst/>
@@ -5151,7 +5151,7 @@
             <a:avLst/>
           </a:prstGeom>
           <a:solidFill>
-            <a:srgbClr val="1E2A6E"/>
+            <a:srgbClr val="1E3E69"/>
           </a:solidFill>
           <a:ln>
             <a:noFill/>
@@ -5283,11 +5283,11 @@
             </a:avLst>
           </a:prstGeom>
           <a:solidFill>
-            <a:srgbClr val="F6F8FD"/>
+            <a:srgbClr val="F4F7FA"/>
           </a:solidFill>
           <a:ln w="9525">
             <a:solidFill>
-              <a:srgbClr val="DEE3F0"/>
+              <a:srgbClr val="D8E1EE"/>
             </a:solidFill>
           </a:ln>
           <a:effectLst/>
@@ -5315,7 +5315,7 @@
             <a:avLst/>
           </a:prstGeom>
           <a:solidFill>
-            <a:srgbClr val="2457D6"/>
+            <a:srgbClr val="1E7F5B"/>
           </a:solidFill>
           <a:ln>
             <a:noFill/>
@@ -5447,11 +5447,11 @@
             </a:avLst>
           </a:prstGeom>
           <a:solidFill>
-            <a:srgbClr val="F6F8FD"/>
+            <a:srgbClr val="F4F7FA"/>
           </a:solidFill>
           <a:ln w="9525">
             <a:solidFill>
-              <a:srgbClr val="DEE3F0"/>
+              <a:srgbClr val="D8E1EE"/>
             </a:solidFill>
           </a:ln>
           <a:effectLst/>
@@ -5479,7 +5479,7 @@
             <a:avLst/>
           </a:prstGeom>
           <a:solidFill>
-            <a:srgbClr val="1E2A6E"/>
+            <a:srgbClr val="1E3E69"/>
           </a:solidFill>
           <a:ln>
             <a:noFill/>
@@ -5611,11 +5611,11 @@
             </a:avLst>
           </a:prstGeom>
           <a:solidFill>
-            <a:srgbClr val="F6F8FD"/>
+            <a:srgbClr val="F4F7FA"/>
           </a:solidFill>
           <a:ln w="9525">
             <a:solidFill>
-              <a:srgbClr val="DEE3F0"/>
+              <a:srgbClr val="D8E1EE"/>
             </a:solidFill>
           </a:ln>
           <a:effectLst/>
@@ -5643,7 +5643,7 @@
             <a:avLst/>
           </a:prstGeom>
           <a:solidFill>
-            <a:srgbClr val="2457D6"/>
+            <a:srgbClr val="1E7F5B"/>
           </a:solidFill>
           <a:ln>
             <a:noFill/>
@@ -5773,7 +5773,7 @@
             <a:avLst/>
           </a:prstGeom>
           <a:solidFill>
-            <a:srgbClr val="DEE3F0"/>
+            <a:srgbClr val="D8E1EE"/>
           </a:solidFill>
           <a:ln>
             <a:noFill/>
@@ -5903,7 +5903,7 @@
             <a:avLst/>
           </a:prstGeom>
           <a:solidFill>
-            <a:srgbClr val="F4F6FC"/>
+            <a:srgbClr val="F3F8F6"/>
           </a:solidFill>
           <a:ln>
             <a:noFill/>
@@ -5963,7 +5963,7 @@
             <a:avLst/>
           </a:prstGeom>
           <a:solidFill>
-            <a:srgbClr val="F8F8FA"/>
+            <a:srgbClr val="F8F9FA"/>
           </a:solidFill>
           <a:ln>
             <a:noFill/>
@@ -6008,7 +6008,7 @@
             <a:r>
               <a:rPr sz="1950" b="1" spc="160">
                 <a:solidFill>
-                  <a:srgbClr val="2457D6"/>
+                  <a:srgbClr val="1E7F5B"/>
                 </a:solidFill>
                 <a:latin typeface="Pretendard"/>
                 <a:ea typeface="Pretendard"/>
@@ -6049,7 +6049,7 @@
             <a:r>
               <a:rPr sz="5100" b="1">
                 <a:solidFill>
-                  <a:srgbClr val="1E2A6E"/>
+                  <a:srgbClr val="1E3E69"/>
                 </a:solidFill>
                 <a:latin typeface="Pretendard"/>
                 <a:ea typeface="Pretendard"/>
@@ -6075,7 +6075,7 @@
             <a:avLst/>
           </a:prstGeom>
           <a:solidFill>
-            <a:srgbClr val="1E2A6E"/>
+            <a:srgbClr val="1E3E69"/>
           </a:solidFill>
           <a:ln>
             <a:noFill/>
@@ -6107,11 +6107,11 @@
             </a:avLst>
           </a:prstGeom>
           <a:solidFill>
-            <a:srgbClr val="F6F8FD"/>
+            <a:srgbClr val="F4F7FA"/>
           </a:solidFill>
           <a:ln w="9525">
             <a:solidFill>
-              <a:srgbClr val="DEE3F0"/>
+              <a:srgbClr val="D8E1EE"/>
             </a:solidFill>
           </a:ln>
           <a:effectLst/>
@@ -6145,7 +6145,7 @@
           </a:solidFill>
           <a:ln w="28575">
             <a:solidFill>
-              <a:srgbClr val="1E2A6E"/>
+              <a:srgbClr val="1E3E69"/>
             </a:solidFill>
           </a:ln>
           <a:effectLst/>
@@ -6188,7 +6188,7 @@
             <a:r>
               <a:rPr sz="2325" b="1">
                 <a:solidFill>
-                  <a:srgbClr val="1E2A6E"/>
+                  <a:srgbClr val="1E3E69"/>
                 </a:solidFill>
                 <a:latin typeface="Pretendard"/>
                 <a:ea typeface="Pretendard"/>
@@ -6237,11 +6237,11 @@
             </a:avLst>
           </a:prstGeom>
           <a:solidFill>
-            <a:srgbClr val="F6F8FD"/>
+            <a:srgbClr val="F4F7FA"/>
           </a:solidFill>
           <a:ln w="9525">
             <a:solidFill>
-              <a:srgbClr val="DEE3F0"/>
+              <a:srgbClr val="D8E1EE"/>
             </a:solidFill>
           </a:ln>
           <a:effectLst/>
@@ -6275,7 +6275,7 @@
           </a:solidFill>
           <a:ln w="28575">
             <a:solidFill>
-              <a:srgbClr val="1E2A6E"/>
+              <a:srgbClr val="1E3E69"/>
             </a:solidFill>
           </a:ln>
           <a:effectLst/>
@@ -6318,7 +6318,7 @@
             <a:r>
               <a:rPr sz="2325" b="1">
                 <a:solidFill>
-                  <a:srgbClr val="1E2A6E"/>
+                  <a:srgbClr val="1E3E69"/>
                 </a:solidFill>
                 <a:latin typeface="Pretendard"/>
                 <a:ea typeface="Pretendard"/>
@@ -6367,11 +6367,11 @@
             </a:avLst>
           </a:prstGeom>
           <a:solidFill>
-            <a:srgbClr val="F6F8FD"/>
+            <a:srgbClr val="F4F7FA"/>
           </a:solidFill>
           <a:ln w="9525">
             <a:solidFill>
-              <a:srgbClr val="DEE3F0"/>
+              <a:srgbClr val="D8E1EE"/>
             </a:solidFill>
           </a:ln>
           <a:effectLst/>
@@ -6405,7 +6405,7 @@
           </a:solidFill>
           <a:ln w="28575">
             <a:solidFill>
-              <a:srgbClr val="1E2A6E"/>
+              <a:srgbClr val="1E3E69"/>
             </a:solidFill>
           </a:ln>
           <a:effectLst/>
@@ -6448,7 +6448,7 @@
             <a:r>
               <a:rPr sz="2325" b="1">
                 <a:solidFill>
-                  <a:srgbClr val="1E2A6E"/>
+                  <a:srgbClr val="1E3E69"/>
                 </a:solidFill>
                 <a:latin typeface="Pretendard"/>
                 <a:ea typeface="Pretendard"/>
@@ -6497,11 +6497,11 @@
             </a:avLst>
           </a:prstGeom>
           <a:solidFill>
-            <a:srgbClr val="F6F8FD"/>
+            <a:srgbClr val="F4F7FA"/>
           </a:solidFill>
           <a:ln w="9525">
             <a:solidFill>
-              <a:srgbClr val="DEE3F0"/>
+              <a:srgbClr val="D8E1EE"/>
             </a:solidFill>
           </a:ln>
           <a:effectLst/>
@@ -6535,7 +6535,7 @@
           </a:solidFill>
           <a:ln w="28575">
             <a:solidFill>
-              <a:srgbClr val="1E2A6E"/>
+              <a:srgbClr val="1E3E69"/>
             </a:solidFill>
           </a:ln>
           <a:effectLst/>
@@ -6578,7 +6578,7 @@
             <a:r>
               <a:rPr sz="2325" b="1">
                 <a:solidFill>
-                  <a:srgbClr val="1E2A6E"/>
+                  <a:srgbClr val="1E3E69"/>
                 </a:solidFill>
                 <a:latin typeface="Pretendard"/>
                 <a:ea typeface="Pretendard"/>
@@ -6627,11 +6627,11 @@
             </a:avLst>
           </a:prstGeom>
           <a:solidFill>
-            <a:srgbClr val="F6F8FD"/>
+            <a:srgbClr val="F4F7FA"/>
           </a:solidFill>
           <a:ln w="9525">
             <a:solidFill>
-              <a:srgbClr val="DEE3F0"/>
+              <a:srgbClr val="D8E1EE"/>
             </a:solidFill>
           </a:ln>
           <a:effectLst/>
@@ -6665,7 +6665,7 @@
           </a:solidFill>
           <a:ln w="28575">
             <a:solidFill>
-              <a:srgbClr val="1E2A6E"/>
+              <a:srgbClr val="1E3E69"/>
             </a:solidFill>
           </a:ln>
           <a:effectLst/>
@@ -6708,7 +6708,7 @@
             <a:r>
               <a:rPr sz="2325" b="1">
                 <a:solidFill>
-                  <a:srgbClr val="1E2A6E"/>
+                  <a:srgbClr val="1E3E69"/>
                 </a:solidFill>
                 <a:latin typeface="Pretendard"/>
                 <a:ea typeface="Pretendard"/>
@@ -6755,7 +6755,7 @@
             <a:avLst/>
           </a:prstGeom>
           <a:solidFill>
-            <a:srgbClr val="C9D7FF"/>
+            <a:srgbClr val="C3E6D8"/>
           </a:solidFill>
           <a:ln>
             <a:noFill/>
@@ -6826,7 +6826,7 @@
             <a:avLst/>
           </a:prstGeom>
           <a:solidFill>
-            <a:srgbClr val="DEE3F0"/>
+            <a:srgbClr val="D8E1EE"/>
           </a:solidFill>
           <a:ln>
             <a:noFill/>
@@ -6956,7 +6956,7 @@
             <a:avLst/>
           </a:prstGeom>
           <a:solidFill>
-            <a:srgbClr val="F4F6FC"/>
+            <a:srgbClr val="F3F8F6"/>
           </a:solidFill>
           <a:ln>
             <a:noFill/>
@@ -7016,7 +7016,7 @@
             <a:avLst/>
           </a:prstGeom>
           <a:solidFill>
-            <a:srgbClr val="F8F8FA"/>
+            <a:srgbClr val="F8F9FA"/>
           </a:solidFill>
           <a:ln>
             <a:noFill/>
@@ -7061,7 +7061,7 @@
             <a:r>
               <a:rPr sz="1950" b="1" spc="160">
                 <a:solidFill>
-                  <a:srgbClr val="2457D6"/>
+                  <a:srgbClr val="1E7F5B"/>
                 </a:solidFill>
                 <a:latin typeface="Pretendard"/>
                 <a:ea typeface="Pretendard"/>
@@ -7102,7 +7102,7 @@
             <a:r>
               <a:rPr sz="5100" b="1">
                 <a:solidFill>
-                  <a:srgbClr val="1E2A6E"/>
+                  <a:srgbClr val="1E3E69"/>
                 </a:solidFill>
                 <a:latin typeface="Pretendard"/>
                 <a:ea typeface="Pretendard"/>
@@ -7128,7 +7128,7 @@
             <a:avLst/>
           </a:prstGeom>
           <a:solidFill>
-            <a:srgbClr val="1E2A6E"/>
+            <a:srgbClr val="1E3E69"/>
           </a:solidFill>
           <a:ln>
             <a:noFill/>
@@ -7160,11 +7160,11 @@
             </a:avLst>
           </a:prstGeom>
           <a:solidFill>
-            <a:srgbClr val="F6F8FD"/>
+            <a:srgbClr val="F4F7FA"/>
           </a:solidFill>
           <a:ln w="9525">
             <a:solidFill>
-              <a:srgbClr val="DEE3F0"/>
+              <a:srgbClr val="D8E1EE"/>
             </a:solidFill>
           </a:ln>
           <a:effectLst/>
@@ -7192,7 +7192,7 @@
             <a:avLst/>
           </a:prstGeom>
           <a:solidFill>
-            <a:srgbClr val="1E2A6E"/>
+            <a:srgbClr val="1E3E69"/>
           </a:solidFill>
           <a:ln>
             <a:noFill/>
@@ -7278,7 +7278,7 @@
             <a:r>
               <a:rPr sz="2100" b="1">
                 <a:solidFill>
-                  <a:srgbClr val="1E2A6E"/>
+                  <a:srgbClr val="1E3E69"/>
                 </a:solidFill>
                 <a:latin typeface="Pretendard"/>
                 <a:ea typeface="Pretendard"/>
@@ -7306,11 +7306,11 @@
             </a:avLst>
           </a:prstGeom>
           <a:solidFill>
-            <a:srgbClr val="F6F8FD"/>
+            <a:srgbClr val="F4F7FA"/>
           </a:solidFill>
           <a:ln w="9525">
             <a:solidFill>
-              <a:srgbClr val="DEE3F0"/>
+              <a:srgbClr val="D8E1EE"/>
             </a:solidFill>
           </a:ln>
           <a:effectLst/>
@@ -7338,7 +7338,7 @@
             <a:avLst/>
           </a:prstGeom>
           <a:solidFill>
-            <a:srgbClr val="1E2A6E"/>
+            <a:srgbClr val="1E3E69"/>
           </a:solidFill>
           <a:ln>
             <a:noFill/>
@@ -7424,7 +7424,7 @@
             <a:r>
               <a:rPr sz="2100" b="1">
                 <a:solidFill>
-                  <a:srgbClr val="1E2A6E"/>
+                  <a:srgbClr val="1E3E69"/>
                 </a:solidFill>
                 <a:latin typeface="Pretendard"/>
                 <a:ea typeface="Pretendard"/>
@@ -7452,11 +7452,11 @@
             </a:avLst>
           </a:prstGeom>
           <a:solidFill>
-            <a:srgbClr val="F6F8FD"/>
+            <a:srgbClr val="F4F7FA"/>
           </a:solidFill>
           <a:ln w="9525">
             <a:solidFill>
-              <a:srgbClr val="DEE3F0"/>
+              <a:srgbClr val="D8E1EE"/>
             </a:solidFill>
           </a:ln>
           <a:effectLst/>
@@ -7484,7 +7484,7 @@
             <a:avLst/>
           </a:prstGeom>
           <a:solidFill>
-            <a:srgbClr val="1E2A6E"/>
+            <a:srgbClr val="1E3E69"/>
           </a:solidFill>
           <a:ln>
             <a:noFill/>
@@ -7570,7 +7570,7 @@
             <a:r>
               <a:rPr sz="2100" b="1">
                 <a:solidFill>
-                  <a:srgbClr val="1E2A6E"/>
+                  <a:srgbClr val="1E3E69"/>
                 </a:solidFill>
                 <a:latin typeface="Pretendard"/>
                 <a:ea typeface="Pretendard"/>
@@ -7598,11 +7598,11 @@
             </a:avLst>
           </a:prstGeom>
           <a:solidFill>
-            <a:srgbClr val="F6F8FD"/>
+            <a:srgbClr val="F4F7FA"/>
           </a:solidFill>
           <a:ln w="9525">
             <a:solidFill>
-              <a:srgbClr val="DEE3F0"/>
+              <a:srgbClr val="D8E1EE"/>
             </a:solidFill>
           </a:ln>
           <a:effectLst/>
@@ -7630,7 +7630,7 @@
             <a:avLst/>
           </a:prstGeom>
           <a:solidFill>
-            <a:srgbClr val="1E2A6E"/>
+            <a:srgbClr val="1E3E69"/>
           </a:solidFill>
           <a:ln>
             <a:noFill/>
@@ -7716,7 +7716,7 @@
             <a:r>
               <a:rPr sz="2100" b="1">
                 <a:solidFill>
-                  <a:srgbClr val="1E2A6E"/>
+                  <a:srgbClr val="1E3E69"/>
                 </a:solidFill>
                 <a:latin typeface="Pretendard"/>
                 <a:ea typeface="Pretendard"/>
@@ -7744,11 +7744,11 @@
             </a:avLst>
           </a:prstGeom>
           <a:solidFill>
-            <a:srgbClr val="F6F8FD"/>
+            <a:srgbClr val="F4F7FA"/>
           </a:solidFill>
           <a:ln w="9525">
             <a:solidFill>
-              <a:srgbClr val="DEE3F0"/>
+              <a:srgbClr val="D8E1EE"/>
             </a:solidFill>
           </a:ln>
           <a:effectLst/>
@@ -7776,7 +7776,7 @@
             <a:avLst/>
           </a:prstGeom>
           <a:solidFill>
-            <a:srgbClr val="1E2A6E"/>
+            <a:srgbClr val="1E3E69"/>
           </a:solidFill>
           <a:ln>
             <a:noFill/>
@@ -7862,7 +7862,7 @@
             <a:r>
               <a:rPr sz="2100" b="1">
                 <a:solidFill>
-                  <a:srgbClr val="1E2A6E"/>
+                  <a:srgbClr val="1E3E69"/>
                 </a:solidFill>
                 <a:latin typeface="Pretendard"/>
                 <a:ea typeface="Pretendard"/>
@@ -7890,11 +7890,11 @@
             </a:avLst>
           </a:prstGeom>
           <a:solidFill>
-            <a:srgbClr val="EAF0FF"/>
+            <a:srgbClr val="E6F4EE"/>
           </a:solidFill>
           <a:ln w="9525">
             <a:solidFill>
-              <a:srgbClr val="C9D7FF"/>
+              <a:srgbClr val="C3E6D8"/>
             </a:solidFill>
           </a:ln>
           <a:effectLst/>
@@ -7937,7 +7937,7 @@
             <a:r>
               <a:rPr sz="2475" b="1">
                 <a:solidFill>
-                  <a:srgbClr val="1E2A6E"/>
+                  <a:srgbClr val="1E3E69"/>
                 </a:solidFill>
                 <a:latin typeface="Pretendard"/>
                 <a:ea typeface="Pretendard"/>
@@ -7963,7 +7963,7 @@
             <a:avLst/>
           </a:prstGeom>
           <a:solidFill>
-            <a:srgbClr val="DEE3F0"/>
+            <a:srgbClr val="D8E1EE"/>
           </a:solidFill>
           <a:ln>
             <a:noFill/>
@@ -8093,7 +8093,7 @@
             <a:avLst/>
           </a:prstGeom>
           <a:solidFill>
-            <a:srgbClr val="F4F6FC"/>
+            <a:srgbClr val="F3F8F6"/>
           </a:solidFill>
           <a:ln>
             <a:noFill/>
@@ -8153,7 +8153,7 @@
             <a:avLst/>
           </a:prstGeom>
           <a:solidFill>
-            <a:srgbClr val="F8F8FA"/>
+            <a:srgbClr val="F8F9FA"/>
           </a:solidFill>
           <a:ln>
             <a:noFill/>
@@ -8198,7 +8198,7 @@
             <a:r>
               <a:rPr sz="1950" b="1" spc="160">
                 <a:solidFill>
-                  <a:srgbClr val="2457D6"/>
+                  <a:srgbClr val="1E7F5B"/>
                 </a:solidFill>
                 <a:latin typeface="Pretendard"/>
                 <a:ea typeface="Pretendard"/>
@@ -8239,7 +8239,7 @@
             <a:r>
               <a:rPr sz="5100" b="1">
                 <a:solidFill>
-                  <a:srgbClr val="1E2A6E"/>
+                  <a:srgbClr val="1E3E69"/>
                 </a:solidFill>
                 <a:latin typeface="Pretendard"/>
                 <a:ea typeface="Pretendard"/>
@@ -8265,7 +8265,7 @@
             <a:avLst/>
           </a:prstGeom>
           <a:solidFill>
-            <a:srgbClr val="1E2A6E"/>
+            <a:srgbClr val="1E3E69"/>
           </a:solidFill>
           <a:ln>
             <a:noFill/>
@@ -8295,7 +8295,7 @@
             <a:avLst/>
           </a:prstGeom>
           <a:solidFill>
-            <a:srgbClr val="1E2A6E"/>
+            <a:srgbClr val="1E3E69"/>
           </a:solidFill>
           <a:ln>
             <a:noFill/>
@@ -8366,7 +8366,7 @@
             <a:avLst/>
           </a:prstGeom>
           <a:solidFill>
-            <a:srgbClr val="2457D6"/>
+            <a:srgbClr val="1E7F5B"/>
           </a:solidFill>
           <a:ln>
             <a:noFill/>
@@ -8437,7 +8437,7 @@
             <a:avLst/>
           </a:prstGeom>
           <a:solidFill>
-            <a:srgbClr val="2457D6"/>
+            <a:srgbClr val="1E7F5B"/>
           </a:solidFill>
           <a:ln>
             <a:noFill/>
@@ -8510,11 +8510,11 @@
             </a:avLst>
           </a:prstGeom>
           <a:solidFill>
-            <a:srgbClr val="EAF0FF"/>
+            <a:srgbClr val="E6F4EE"/>
           </a:solidFill>
           <a:ln w="9525">
             <a:solidFill>
-              <a:srgbClr val="C9D7FF"/>
+              <a:srgbClr val="C3E6D8"/>
             </a:solidFill>
           </a:ln>
           <a:effectLst/>
@@ -8557,7 +8557,7 @@
             <a:r>
               <a:rPr sz="1875" b="1">
                 <a:solidFill>
-                  <a:srgbClr val="1E2A6E"/>
+                  <a:srgbClr val="1E3E69"/>
                 </a:solidFill>
                 <a:latin typeface="Pretendard"/>
                 <a:ea typeface="Pretendard"/>
@@ -8585,11 +8585,11 @@
             </a:avLst>
           </a:prstGeom>
           <a:solidFill>
-            <a:srgbClr val="F6F8FD"/>
+            <a:srgbClr val="F4F7FA"/>
           </a:solidFill>
           <a:ln w="9525">
             <a:solidFill>
-              <a:srgbClr val="DEE3F0"/>
+              <a:srgbClr val="D8E1EE"/>
             </a:solidFill>
           </a:ln>
           <a:effectLst/>
@@ -8660,11 +8660,11 @@
             </a:avLst>
           </a:prstGeom>
           <a:solidFill>
-            <a:srgbClr val="F6F8FD"/>
+            <a:srgbClr val="F4F7FA"/>
           </a:solidFill>
           <a:ln w="9525">
             <a:solidFill>
-              <a:srgbClr val="DEE3F0"/>
+              <a:srgbClr val="D8E1EE"/>
             </a:solidFill>
           </a:ln>
           <a:effectLst/>
@@ -8735,11 +8735,11 @@
             </a:avLst>
           </a:prstGeom>
           <a:solidFill>
-            <a:srgbClr val="EAF0FF"/>
+            <a:srgbClr val="E6F4EE"/>
           </a:solidFill>
           <a:ln w="9525">
             <a:solidFill>
-              <a:srgbClr val="C9D7FF"/>
+              <a:srgbClr val="C3E6D8"/>
             </a:solidFill>
           </a:ln>
           <a:effectLst/>
@@ -8782,7 +8782,7 @@
             <a:r>
               <a:rPr sz="1875" b="1">
                 <a:solidFill>
-                  <a:srgbClr val="1E2A6E"/>
+                  <a:srgbClr val="1E3E69"/>
                 </a:solidFill>
                 <a:latin typeface="Pretendard"/>
                 <a:ea typeface="Pretendard"/>
@@ -8810,11 +8810,11 @@
             </a:avLst>
           </a:prstGeom>
           <a:solidFill>
-            <a:srgbClr val="F6F8FD"/>
+            <a:srgbClr val="F4F7FA"/>
           </a:solidFill>
           <a:ln w="9525">
             <a:solidFill>
-              <a:srgbClr val="DEE3F0"/>
+              <a:srgbClr val="D8E1EE"/>
             </a:solidFill>
           </a:ln>
           <a:effectLst/>
@@ -8885,11 +8885,11 @@
             </a:avLst>
           </a:prstGeom>
           <a:solidFill>
-            <a:srgbClr val="F6F8FD"/>
+            <a:srgbClr val="F4F7FA"/>
           </a:solidFill>
           <a:ln w="9525">
             <a:solidFill>
-              <a:srgbClr val="DEE3F0"/>
+              <a:srgbClr val="D8E1EE"/>
             </a:solidFill>
           </a:ln>
           <a:effectLst/>
@@ -8960,11 +8960,11 @@
             </a:avLst>
           </a:prstGeom>
           <a:solidFill>
-            <a:srgbClr val="EAF0FF"/>
+            <a:srgbClr val="E6F4EE"/>
           </a:solidFill>
           <a:ln w="9525">
             <a:solidFill>
-              <a:srgbClr val="C9D7FF"/>
+              <a:srgbClr val="C3E6D8"/>
             </a:solidFill>
           </a:ln>
           <a:effectLst/>
@@ -9007,7 +9007,7 @@
             <a:r>
               <a:rPr sz="1875" b="1">
                 <a:solidFill>
-                  <a:srgbClr val="1E2A6E"/>
+                  <a:srgbClr val="1E3E69"/>
                 </a:solidFill>
                 <a:latin typeface="Pretendard"/>
                 <a:ea typeface="Pretendard"/>
@@ -9035,11 +9035,11 @@
             </a:avLst>
           </a:prstGeom>
           <a:solidFill>
-            <a:srgbClr val="F6F8FD"/>
+            <a:srgbClr val="F4F7FA"/>
           </a:solidFill>
           <a:ln w="9525">
             <a:solidFill>
-              <a:srgbClr val="DEE3F0"/>
+              <a:srgbClr val="D8E1EE"/>
             </a:solidFill>
           </a:ln>
           <a:effectLst/>
@@ -9110,11 +9110,11 @@
             </a:avLst>
           </a:prstGeom>
           <a:solidFill>
-            <a:srgbClr val="F6F8FD"/>
+            <a:srgbClr val="F4F7FA"/>
           </a:solidFill>
           <a:ln w="9525">
             <a:solidFill>
-              <a:srgbClr val="DEE3F0"/>
+              <a:srgbClr val="D8E1EE"/>
             </a:solidFill>
           </a:ln>
           <a:effectLst/>
@@ -9185,11 +9185,11 @@
             </a:avLst>
           </a:prstGeom>
           <a:solidFill>
-            <a:srgbClr val="EAF0FF"/>
+            <a:srgbClr val="E6F4EE"/>
           </a:solidFill>
           <a:ln w="9525">
             <a:solidFill>
-              <a:srgbClr val="C9D7FF"/>
+              <a:srgbClr val="C3E6D8"/>
             </a:solidFill>
           </a:ln>
           <a:effectLst/>
@@ -9232,7 +9232,7 @@
             <a:r>
               <a:rPr sz="1875" b="1">
                 <a:solidFill>
-                  <a:srgbClr val="1E2A6E"/>
+                  <a:srgbClr val="1E3E69"/>
                 </a:solidFill>
                 <a:latin typeface="Pretendard"/>
                 <a:ea typeface="Pretendard"/>
@@ -9260,11 +9260,11 @@
             </a:avLst>
           </a:prstGeom>
           <a:solidFill>
-            <a:srgbClr val="F6F8FD"/>
+            <a:srgbClr val="F4F7FA"/>
           </a:solidFill>
           <a:ln w="9525">
             <a:solidFill>
-              <a:srgbClr val="DEE3F0"/>
+              <a:srgbClr val="D8E1EE"/>
             </a:solidFill>
           </a:ln>
           <a:effectLst/>
@@ -9335,11 +9335,11 @@
             </a:avLst>
           </a:prstGeom>
           <a:solidFill>
-            <a:srgbClr val="F6F8FD"/>
+            <a:srgbClr val="F4F7FA"/>
           </a:solidFill>
           <a:ln w="9525">
             <a:solidFill>
-              <a:srgbClr val="DEE3F0"/>
+              <a:srgbClr val="D8E1EE"/>
             </a:solidFill>
           </a:ln>
           <a:effectLst/>
@@ -9410,11 +9410,11 @@
             </a:avLst>
           </a:prstGeom>
           <a:solidFill>
-            <a:srgbClr val="EAF0FF"/>
+            <a:srgbClr val="E6F4EE"/>
           </a:solidFill>
           <a:ln w="9525">
             <a:solidFill>
-              <a:srgbClr val="C9D7FF"/>
+              <a:srgbClr val="C3E6D8"/>
             </a:solidFill>
           </a:ln>
           <a:effectLst/>
@@ -9457,7 +9457,7 @@
             <a:r>
               <a:rPr sz="1875" b="1">
                 <a:solidFill>
-                  <a:srgbClr val="1E2A6E"/>
+                  <a:srgbClr val="1E3E69"/>
                 </a:solidFill>
                 <a:latin typeface="Pretendard"/>
                 <a:ea typeface="Pretendard"/>
@@ -9485,11 +9485,11 @@
             </a:avLst>
           </a:prstGeom>
           <a:solidFill>
-            <a:srgbClr val="F6F8FD"/>
+            <a:srgbClr val="F4F7FA"/>
           </a:solidFill>
           <a:ln w="9525">
             <a:solidFill>
-              <a:srgbClr val="DEE3F0"/>
+              <a:srgbClr val="D8E1EE"/>
             </a:solidFill>
           </a:ln>
           <a:effectLst/>
@@ -9560,11 +9560,11 @@
             </a:avLst>
           </a:prstGeom>
           <a:solidFill>
-            <a:srgbClr val="F6F8FD"/>
+            <a:srgbClr val="F4F7FA"/>
           </a:solidFill>
           <a:ln w="9525">
             <a:solidFill>
-              <a:srgbClr val="DEE3F0"/>
+              <a:srgbClr val="D8E1EE"/>
             </a:solidFill>
           </a:ln>
           <a:effectLst/>
@@ -9674,7 +9674,7 @@
             <a:avLst/>
           </a:prstGeom>
           <a:solidFill>
-            <a:srgbClr val="DEE3F0"/>
+            <a:srgbClr val="D8E1EE"/>
           </a:solidFill>
           <a:ln>
             <a:noFill/>
@@ -9804,7 +9804,7 @@
             <a:avLst/>
           </a:prstGeom>
           <a:solidFill>
-            <a:srgbClr val="F4F6FC"/>
+            <a:srgbClr val="F3F8F6"/>
           </a:solidFill>
           <a:ln>
             <a:noFill/>
@@ -9834,7 +9834,7 @@
             <a:avLst/>
           </a:prstGeom>
           <a:solidFill>
-            <a:srgbClr val="F6F6F9"/>
+            <a:srgbClr val="F6F7F9"/>
           </a:solidFill>
           <a:ln>
             <a:noFill/>
@@ -9864,7 +9864,7 @@
             <a:avLst/>
           </a:prstGeom>
           <a:solidFill>
-            <a:srgbClr val="1E2A6E"/>
+            <a:srgbClr val="1E3E69"/>
           </a:solidFill>
           <a:ln>
             <a:noFill/>
@@ -9909,7 +9909,7 @@
             <a:r>
               <a:rPr sz="2400" b="1">
                 <a:solidFill>
-                  <a:srgbClr val="2457D6"/>
+                  <a:srgbClr val="1E7F5B"/>
                 </a:solidFill>
                 <a:latin typeface="Pretendard"/>
                 <a:ea typeface="Pretendard"/>
@@ -9950,7 +9950,7 @@
             <a:r>
               <a:rPr sz="6600" b="1">
                 <a:solidFill>
-                  <a:srgbClr val="1E2A6E"/>
+                  <a:srgbClr val="1E3E69"/>
                 </a:solidFill>
                 <a:latin typeface="Pretendard"/>
                 <a:ea typeface="Pretendard"/>
@@ -10017,7 +10017,7 @@
             <a:avLst/>
           </a:prstGeom>
           <a:solidFill>
-            <a:srgbClr val="DEE3F0"/>
+            <a:srgbClr val="D8E1EE"/>
           </a:solidFill>
           <a:ln>
             <a:noFill/>
@@ -10147,7 +10147,7 @@
             <a:avLst/>
           </a:prstGeom>
           <a:solidFill>
-            <a:srgbClr val="F4F6FC"/>
+            <a:srgbClr val="F3F8F6"/>
           </a:solidFill>
           <a:ln>
             <a:noFill/>
@@ -10207,7 +10207,7 @@
             <a:avLst/>
           </a:prstGeom>
           <a:solidFill>
-            <a:srgbClr val="F8F8FA"/>
+            <a:srgbClr val="F8F9FA"/>
           </a:solidFill>
           <a:ln>
             <a:noFill/>
@@ -10252,7 +10252,7 @@
             <a:r>
               <a:rPr sz="1950" b="1" spc="160">
                 <a:solidFill>
-                  <a:srgbClr val="2457D6"/>
+                  <a:srgbClr val="1E7F5B"/>
                 </a:solidFill>
                 <a:latin typeface="Pretendard"/>
                 <a:ea typeface="Pretendard"/>
@@ -10293,7 +10293,7 @@
             <a:r>
               <a:rPr sz="5100" b="1">
                 <a:solidFill>
-                  <a:srgbClr val="1E2A6E"/>
+                  <a:srgbClr val="1E3E69"/>
                 </a:solidFill>
                 <a:latin typeface="Pretendard"/>
                 <a:ea typeface="Pretendard"/>
@@ -10319,7 +10319,7 @@
             <a:avLst/>
           </a:prstGeom>
           <a:solidFill>
-            <a:srgbClr val="1E2A6E"/>
+            <a:srgbClr val="1E3E69"/>
           </a:solidFill>
           <a:ln>
             <a:noFill/>
@@ -10349,7 +10349,7 @@
             <a:avLst/>
           </a:prstGeom>
           <a:solidFill>
-            <a:srgbClr val="1E2A6E"/>
+            <a:srgbClr val="1E3E69"/>
           </a:solidFill>
           <a:ln>
             <a:noFill/>
@@ -10422,11 +10422,11 @@
             </a:avLst>
           </a:prstGeom>
           <a:solidFill>
-            <a:srgbClr val="F6F8FD"/>
+            <a:srgbClr val="F4F7FA"/>
           </a:solidFill>
           <a:ln w="9525">
             <a:solidFill>
-              <a:srgbClr val="DEE3F0"/>
+              <a:srgbClr val="D8E1EE"/>
             </a:solidFill>
           </a:ln>
           <a:effectLst/>
@@ -10513,7 +10513,7 @@
             <a:avLst/>
           </a:prstGeom>
           <a:solidFill>
-            <a:srgbClr val="2457D6"/>
+            <a:srgbClr val="1E7F5B"/>
           </a:solidFill>
           <a:ln>
             <a:noFill/>
@@ -10543,7 +10543,7 @@
             <a:avLst/>
           </a:prstGeom>
           <a:solidFill>
-            <a:srgbClr val="2457D6"/>
+            <a:srgbClr val="1E7F5B"/>
           </a:solidFill>
           <a:ln>
             <a:noFill/>
@@ -10616,11 +10616,11 @@
             </a:avLst>
           </a:prstGeom>
           <a:solidFill>
-            <a:srgbClr val="F6F8FD"/>
+            <a:srgbClr val="F4F7FA"/>
           </a:solidFill>
           <a:ln w="9525">
             <a:solidFill>
-              <a:srgbClr val="DEE3F0"/>
+              <a:srgbClr val="D8E1EE"/>
             </a:solidFill>
           </a:ln>
           <a:effectLst/>
@@ -10707,7 +10707,7 @@
             <a:avLst/>
           </a:prstGeom>
           <a:solidFill>
-            <a:srgbClr val="2457D6"/>
+            <a:srgbClr val="1E7F5B"/>
           </a:solidFill>
           <a:ln>
             <a:noFill/>
@@ -10737,7 +10737,7 @@
             <a:avLst/>
           </a:prstGeom>
           <a:solidFill>
-            <a:srgbClr val="1E2A6E"/>
+            <a:srgbClr val="1E3E69"/>
           </a:solidFill>
           <a:ln>
             <a:noFill/>
@@ -10810,11 +10810,11 @@
             </a:avLst>
           </a:prstGeom>
           <a:solidFill>
-            <a:srgbClr val="F6F8FD"/>
+            <a:srgbClr val="F4F7FA"/>
           </a:solidFill>
           <a:ln w="9525">
             <a:solidFill>
-              <a:srgbClr val="DEE3F0"/>
+              <a:srgbClr val="D8E1EE"/>
             </a:solidFill>
           </a:ln>
           <a:effectLst/>
@@ -10901,7 +10901,7 @@
             <a:avLst/>
           </a:prstGeom>
           <a:solidFill>
-            <a:srgbClr val="2457D6"/>
+            <a:srgbClr val="1E7F5B"/>
           </a:solidFill>
           <a:ln>
             <a:noFill/>
@@ -10931,7 +10931,7 @@
             <a:avLst/>
           </a:prstGeom>
           <a:solidFill>
-            <a:srgbClr val="2457D6"/>
+            <a:srgbClr val="1E7F5B"/>
           </a:solidFill>
           <a:ln>
             <a:noFill/>
@@ -11004,11 +11004,11 @@
             </a:avLst>
           </a:prstGeom>
           <a:solidFill>
-            <a:srgbClr val="F6F8FD"/>
+            <a:srgbClr val="F4F7FA"/>
           </a:solidFill>
           <a:ln w="9525">
             <a:solidFill>
-              <a:srgbClr val="DEE3F0"/>
+              <a:srgbClr val="D8E1EE"/>
             </a:solidFill>
           </a:ln>
           <a:effectLst/>
@@ -11095,7 +11095,7 @@
             <a:avLst/>
           </a:prstGeom>
           <a:solidFill>
-            <a:srgbClr val="2457D6"/>
+            <a:srgbClr val="1E7F5B"/>
           </a:solidFill>
           <a:ln>
             <a:noFill/>
@@ -11125,7 +11125,7 @@
             <a:avLst/>
           </a:prstGeom>
           <a:solidFill>
-            <a:srgbClr val="1E2A6E"/>
+            <a:srgbClr val="1E3E69"/>
           </a:solidFill>
           <a:ln>
             <a:noFill/>
@@ -11198,11 +11198,11 @@
             </a:avLst>
           </a:prstGeom>
           <a:solidFill>
-            <a:srgbClr val="F6F8FD"/>
+            <a:srgbClr val="F4F7FA"/>
           </a:solidFill>
           <a:ln w="9525">
             <a:solidFill>
-              <a:srgbClr val="DEE3F0"/>
+              <a:srgbClr val="D8E1EE"/>
             </a:solidFill>
           </a:ln>
           <a:effectLst/>
@@ -11330,7 +11330,7 @@
             <a:avLst/>
           </a:prstGeom>
           <a:solidFill>
-            <a:srgbClr val="DEE3F0"/>
+            <a:srgbClr val="D8E1EE"/>
           </a:solidFill>
           <a:ln>
             <a:noFill/>
@@ -11460,7 +11460,7 @@
             <a:avLst/>
           </a:prstGeom>
           <a:solidFill>
-            <a:srgbClr val="F4F6FC"/>
+            <a:srgbClr val="F3F8F6"/>
           </a:solidFill>
           <a:ln>
             <a:noFill/>
@@ -11520,7 +11520,7 @@
             <a:avLst/>
           </a:prstGeom>
           <a:solidFill>
-            <a:srgbClr val="F8F8FA"/>
+            <a:srgbClr val="F8F9FA"/>
           </a:solidFill>
           <a:ln>
             <a:noFill/>
@@ -11565,7 +11565,7 @@
             <a:r>
               <a:rPr sz="1950" b="1" spc="160">
                 <a:solidFill>
-                  <a:srgbClr val="2457D6"/>
+                  <a:srgbClr val="1E7F5B"/>
                 </a:solidFill>
                 <a:latin typeface="Pretendard"/>
                 <a:ea typeface="Pretendard"/>
@@ -11606,7 +11606,7 @@
             <a:r>
               <a:rPr sz="5100" b="1">
                 <a:solidFill>
-                  <a:srgbClr val="1E2A6E"/>
+                  <a:srgbClr val="1E3E69"/>
                 </a:solidFill>
                 <a:latin typeface="Pretendard"/>
                 <a:ea typeface="Pretendard"/>
@@ -11632,7 +11632,7 @@
             <a:avLst/>
           </a:prstGeom>
           <a:solidFill>
-            <a:srgbClr val="1E2A6E"/>
+            <a:srgbClr val="1E3E69"/>
           </a:solidFill>
           <a:ln>
             <a:noFill/>
@@ -11677,7 +11677,7 @@
             <a:r>
               <a:rPr sz="3150" b="1">
                 <a:solidFill>
-                  <a:srgbClr val="1E2A6E"/>
+                  <a:srgbClr val="1E3E69"/>
                 </a:solidFill>
                 <a:latin typeface="Pretendard"/>
                 <a:ea typeface="Pretendard"/>
@@ -11746,11 +11746,11 @@
             </a:avLst>
           </a:prstGeom>
           <a:solidFill>
-            <a:srgbClr val="F6F8FD"/>
+            <a:srgbClr val="F4F7FA"/>
           </a:solidFill>
           <a:ln w="9525">
             <a:solidFill>
-              <a:srgbClr val="DEE3F0"/>
+              <a:srgbClr val="D8E1EE"/>
             </a:solidFill>
           </a:ln>
           <a:effectLst/>
@@ -11778,7 +11778,7 @@
             <a:avLst/>
           </a:prstGeom>
           <a:solidFill>
-            <a:srgbClr val="2457D6"/>
+            <a:srgbClr val="1E7F5B"/>
           </a:solidFill>
           <a:ln>
             <a:noFill/>
@@ -11849,7 +11849,7 @@
             <a:avLst/>
           </a:prstGeom>
           <a:solidFill>
-            <a:srgbClr val="2457D6"/>
+            <a:srgbClr val="1E7F5B"/>
           </a:solidFill>
           <a:ln>
             <a:noFill/>
@@ -11920,7 +11920,7 @@
             <a:avLst/>
           </a:prstGeom>
           <a:solidFill>
-            <a:srgbClr val="2457D6"/>
+            <a:srgbClr val="1E7F5B"/>
           </a:solidFill>
           <a:ln>
             <a:noFill/>
@@ -12006,7 +12006,7 @@
             <a:r>
               <a:rPr sz="3150" b="1">
                 <a:solidFill>
-                  <a:srgbClr val="1E2A6E"/>
+                  <a:srgbClr val="1E3E69"/>
                 </a:solidFill>
                 <a:latin typeface="Pretendard"/>
                 <a:ea typeface="Pretendard"/>
@@ -12075,11 +12075,11 @@
             </a:avLst>
           </a:prstGeom>
           <a:solidFill>
-            <a:srgbClr val="F6F8FD"/>
+            <a:srgbClr val="F4F7FA"/>
           </a:solidFill>
           <a:ln w="9525">
             <a:solidFill>
-              <a:srgbClr val="DEE3F0"/>
+              <a:srgbClr val="D8E1EE"/>
             </a:solidFill>
           </a:ln>
           <a:effectLst/>
@@ -12107,7 +12107,7 @@
             <a:avLst/>
           </a:prstGeom>
           <a:solidFill>
-            <a:srgbClr val="2457D6"/>
+            <a:srgbClr val="1E7F5B"/>
           </a:solidFill>
           <a:ln>
             <a:noFill/>
@@ -12178,7 +12178,7 @@
             <a:avLst/>
           </a:prstGeom>
           <a:solidFill>
-            <a:srgbClr val="2457D6"/>
+            <a:srgbClr val="1E7F5B"/>
           </a:solidFill>
           <a:ln>
             <a:noFill/>
@@ -12249,7 +12249,7 @@
             <a:avLst/>
           </a:prstGeom>
           <a:solidFill>
-            <a:srgbClr val="2457D6"/>
+            <a:srgbClr val="1E7F5B"/>
           </a:solidFill>
           <a:ln>
             <a:noFill/>
@@ -12320,7 +12320,7 @@
             <a:avLst/>
           </a:prstGeom>
           <a:solidFill>
-            <a:srgbClr val="1E2A6E"/>
+            <a:srgbClr val="1E3E69"/>
           </a:solidFill>
           <a:ln>
             <a:noFill/>
@@ -12391,7 +12391,7 @@
             <a:avLst/>
           </a:prstGeom>
           <a:solidFill>
-            <a:srgbClr val="DEE3F0"/>
+            <a:srgbClr val="D8E1EE"/>
           </a:solidFill>
           <a:ln>
             <a:noFill/>
@@ -12521,7 +12521,7 @@
             <a:avLst/>
           </a:prstGeom>
           <a:solidFill>
-            <a:srgbClr val="F4F6FC"/>
+            <a:srgbClr val="F3F8F6"/>
           </a:solidFill>
           <a:ln>
             <a:noFill/>
@@ -12581,7 +12581,7 @@
             <a:avLst/>
           </a:prstGeom>
           <a:solidFill>
-            <a:srgbClr val="F8F8FA"/>
+            <a:srgbClr val="F8F9FA"/>
           </a:solidFill>
           <a:ln>
             <a:noFill/>
@@ -12613,7 +12613,7 @@
             </a:avLst>
           </a:prstGeom>
           <a:solidFill>
-            <a:srgbClr val="2457D6"/>
+            <a:srgbClr val="1E7F5B"/>
           </a:solidFill>
           <a:ln>
             <a:noFill/>
@@ -12729,7 +12729,7 @@
             <a:r>
               <a:rPr sz="1950" b="1" spc="160">
                 <a:solidFill>
-                  <a:srgbClr val="2457D6"/>
+                  <a:srgbClr val="1E7F5B"/>
                 </a:solidFill>
                 <a:latin typeface="Pretendard"/>
                 <a:ea typeface="Pretendard"/>
@@ -12770,7 +12770,7 @@
             <a:r>
               <a:rPr sz="5100" b="1">
                 <a:solidFill>
-                  <a:srgbClr val="1E2A6E"/>
+                  <a:srgbClr val="1E3E69"/>
                 </a:solidFill>
                 <a:latin typeface="Pretendard"/>
                 <a:ea typeface="Pretendard"/>
@@ -12796,7 +12796,7 @@
             <a:avLst/>
           </a:prstGeom>
           <a:solidFill>
-            <a:srgbClr val="1E2A6E"/>
+            <a:srgbClr val="1E3E69"/>
           </a:solidFill>
           <a:ln>
             <a:noFill/>
@@ -12841,7 +12841,7 @@
             <a:r>
               <a:rPr sz="2250" b="1">
                 <a:solidFill>
-                  <a:srgbClr val="2457D6"/>
+                  <a:srgbClr val="1E7F5B"/>
                 </a:solidFill>
                 <a:latin typeface="Pretendard"/>
                 <a:ea typeface="Pretendard"/>
@@ -12869,11 +12869,11 @@
             </a:avLst>
           </a:prstGeom>
           <a:solidFill>
-            <a:srgbClr val="F6F8FD"/>
+            <a:srgbClr val="F4F7FA"/>
           </a:solidFill>
           <a:ln w="9525">
             <a:solidFill>
-              <a:srgbClr val="DEE3F0"/>
+              <a:srgbClr val="D8E1EE"/>
             </a:solidFill>
           </a:ln>
           <a:effectLst/>
@@ -12901,7 +12901,7 @@
             <a:avLst/>
           </a:prstGeom>
           <a:solidFill>
-            <a:srgbClr val="1E2A6E"/>
+            <a:srgbClr val="1E3E69"/>
           </a:solidFill>
           <a:ln>
             <a:noFill/>
@@ -12987,7 +12987,7 @@
             <a:r>
               <a:rPr sz="2700" b="1">
                 <a:solidFill>
-                  <a:srgbClr val="1E2A6E"/>
+                  <a:srgbClr val="1E3E69"/>
                 </a:solidFill>
                 <a:latin typeface="Pretendard"/>
                 <a:ea typeface="Pretendard"/>
@@ -13013,7 +13013,7 @@
             <a:avLst/>
           </a:prstGeom>
           <a:solidFill>
-            <a:srgbClr val="2457D6"/>
+            <a:srgbClr val="1E7F5B"/>
           </a:solidFill>
           <a:ln>
             <a:noFill/>
@@ -13058,7 +13058,7 @@
             <a:r>
               <a:rPr sz="1875" b="1" spc="150">
                 <a:solidFill>
-                  <a:srgbClr val="2457D6"/>
+                  <a:srgbClr val="1E7F5B"/>
                 </a:solidFill>
                 <a:latin typeface="Pretendard"/>
                 <a:ea typeface="Pretendard"/>
@@ -13099,7 +13099,7 @@
             <a:r>
               <a:rPr sz="2475" b="1">
                 <a:solidFill>
-                  <a:srgbClr val="1E2A6E"/>
+                  <a:srgbClr val="1E3E69"/>
                 </a:solidFill>
                 <a:latin typeface="Pretendard"/>
                 <a:ea typeface="Pretendard"/>
@@ -13125,7 +13125,7 @@
             <a:avLst/>
           </a:prstGeom>
           <a:solidFill>
-            <a:srgbClr val="DEE3F0"/>
+            <a:srgbClr val="D8E1EE"/>
           </a:solidFill>
           <a:ln>
             <a:noFill/>
@@ -13255,7 +13255,7 @@
             <a:avLst/>
           </a:prstGeom>
           <a:solidFill>
-            <a:srgbClr val="F4F6FC"/>
+            <a:srgbClr val="F3F8F6"/>
           </a:solidFill>
           <a:ln>
             <a:noFill/>
@@ -13315,7 +13315,7 @@
             <a:avLst/>
           </a:prstGeom>
           <a:solidFill>
-            <a:srgbClr val="F8F8FA"/>
+            <a:srgbClr val="F8F9FA"/>
           </a:solidFill>
           <a:ln>
             <a:noFill/>
@@ -13360,7 +13360,7 @@
             <a:r>
               <a:rPr sz="1950" b="1" spc="160">
                 <a:solidFill>
-                  <a:srgbClr val="2457D6"/>
+                  <a:srgbClr val="1E7F5B"/>
                 </a:solidFill>
                 <a:latin typeface="Pretendard"/>
                 <a:ea typeface="Pretendard"/>
@@ -13401,7 +13401,7 @@
             <a:r>
               <a:rPr sz="5100" b="1">
                 <a:solidFill>
-                  <a:srgbClr val="1E2A6E"/>
+                  <a:srgbClr val="1E3E69"/>
                 </a:solidFill>
                 <a:latin typeface="Pretendard"/>
                 <a:ea typeface="Pretendard"/>
@@ -13427,7 +13427,7 @@
             <a:avLst/>
           </a:prstGeom>
           <a:solidFill>
-            <a:srgbClr val="1E2A6E"/>
+            <a:srgbClr val="1E3E69"/>
           </a:solidFill>
           <a:ln>
             <a:noFill/>
@@ -13457,7 +13457,7 @@
             <a:avLst/>
           </a:prstGeom>
           <a:solidFill>
-            <a:srgbClr val="1E2A6E"/>
+            <a:srgbClr val="1E3E69"/>
           </a:solidFill>
           <a:ln>
             <a:noFill/>
@@ -13528,7 +13528,7 @@
             <a:avLst/>
           </a:prstGeom>
           <a:solidFill>
-            <a:srgbClr val="2457D6"/>
+            <a:srgbClr val="1E7F5B"/>
           </a:solidFill>
           <a:ln>
             <a:noFill/>
@@ -13599,7 +13599,7 @@
             <a:avLst/>
           </a:prstGeom>
           <a:solidFill>
-            <a:srgbClr val="2457D6"/>
+            <a:srgbClr val="1E7F5B"/>
           </a:solidFill>
           <a:ln>
             <a:noFill/>
@@ -13670,7 +13670,7 @@
             <a:avLst/>
           </a:prstGeom>
           <a:solidFill>
-            <a:srgbClr val="2457D6"/>
+            <a:srgbClr val="1E7F5B"/>
           </a:solidFill>
           <a:ln>
             <a:noFill/>
@@ -13743,11 +13743,11 @@
             </a:avLst>
           </a:prstGeom>
           <a:solidFill>
-            <a:srgbClr val="EAF0FF"/>
+            <a:srgbClr val="E6F4EE"/>
           </a:solidFill>
           <a:ln w="9525">
             <a:solidFill>
-              <a:srgbClr val="C9D7FF"/>
+              <a:srgbClr val="C3E6D8"/>
             </a:solidFill>
           </a:ln>
           <a:effectLst/>
@@ -13790,7 +13790,7 @@
             <a:r>
               <a:rPr sz="1875" b="1">
                 <a:solidFill>
-                  <a:srgbClr val="1E2A6E"/>
+                  <a:srgbClr val="1E3E69"/>
                 </a:solidFill>
                 <a:latin typeface="Pretendard"/>
                 <a:ea typeface="Pretendard"/>
@@ -13818,11 +13818,11 @@
             </a:avLst>
           </a:prstGeom>
           <a:solidFill>
-            <a:srgbClr val="F6F8FD"/>
+            <a:srgbClr val="F4F7FA"/>
           </a:solidFill>
           <a:ln w="9525">
             <a:solidFill>
-              <a:srgbClr val="DEE3F0"/>
+              <a:srgbClr val="D8E1EE"/>
             </a:solidFill>
           </a:ln>
           <a:effectLst/>
@@ -13893,11 +13893,11 @@
             </a:avLst>
           </a:prstGeom>
           <a:solidFill>
-            <a:srgbClr val="F6F8FD"/>
+            <a:srgbClr val="F4F7FA"/>
           </a:solidFill>
           <a:ln w="9525">
             <a:solidFill>
-              <a:srgbClr val="DEE3F0"/>
+              <a:srgbClr val="D8E1EE"/>
             </a:solidFill>
           </a:ln>
           <a:effectLst/>
@@ -13968,11 +13968,11 @@
             </a:avLst>
           </a:prstGeom>
           <a:solidFill>
-            <a:srgbClr val="F6F8FD"/>
+            <a:srgbClr val="F4F7FA"/>
           </a:solidFill>
           <a:ln w="9525">
             <a:solidFill>
-              <a:srgbClr val="DEE3F0"/>
+              <a:srgbClr val="D8E1EE"/>
             </a:solidFill>
           </a:ln>
           <a:effectLst/>
@@ -14043,11 +14043,11 @@
             </a:avLst>
           </a:prstGeom>
           <a:solidFill>
-            <a:srgbClr val="EAF0FF"/>
+            <a:srgbClr val="E6F4EE"/>
           </a:solidFill>
           <a:ln w="9525">
             <a:solidFill>
-              <a:srgbClr val="C9D7FF"/>
+              <a:srgbClr val="C3E6D8"/>
             </a:solidFill>
           </a:ln>
           <a:effectLst/>
@@ -14090,7 +14090,7 @@
             <a:r>
               <a:rPr sz="1875" b="1">
                 <a:solidFill>
-                  <a:srgbClr val="1E2A6E"/>
+                  <a:srgbClr val="1E3E69"/>
                 </a:solidFill>
                 <a:latin typeface="Pretendard"/>
                 <a:ea typeface="Pretendard"/>
@@ -14118,11 +14118,11 @@
             </a:avLst>
           </a:prstGeom>
           <a:solidFill>
-            <a:srgbClr val="F6F8FD"/>
+            <a:srgbClr val="F4F7FA"/>
           </a:solidFill>
           <a:ln w="9525">
             <a:solidFill>
-              <a:srgbClr val="DEE3F0"/>
+              <a:srgbClr val="D8E1EE"/>
             </a:solidFill>
           </a:ln>
           <a:effectLst/>
@@ -14193,11 +14193,11 @@
             </a:avLst>
           </a:prstGeom>
           <a:solidFill>
-            <a:srgbClr val="F6F8FD"/>
+            <a:srgbClr val="F4F7FA"/>
           </a:solidFill>
           <a:ln w="9525">
             <a:solidFill>
-              <a:srgbClr val="DEE3F0"/>
+              <a:srgbClr val="D8E1EE"/>
             </a:solidFill>
           </a:ln>
           <a:effectLst/>
@@ -14268,11 +14268,11 @@
             </a:avLst>
           </a:prstGeom>
           <a:solidFill>
-            <a:srgbClr val="F6F8FD"/>
+            <a:srgbClr val="F4F7FA"/>
           </a:solidFill>
           <a:ln w="9525">
             <a:solidFill>
-              <a:srgbClr val="DEE3F0"/>
+              <a:srgbClr val="D8E1EE"/>
             </a:solidFill>
           </a:ln>
           <a:effectLst/>
@@ -14343,11 +14343,11 @@
             </a:avLst>
           </a:prstGeom>
           <a:solidFill>
-            <a:srgbClr val="EAF0FF"/>
+            <a:srgbClr val="E6F4EE"/>
           </a:solidFill>
           <a:ln w="9525">
             <a:solidFill>
-              <a:srgbClr val="C9D7FF"/>
+              <a:srgbClr val="C3E6D8"/>
             </a:solidFill>
           </a:ln>
           <a:effectLst/>
@@ -14390,7 +14390,7 @@
             <a:r>
               <a:rPr sz="1875" b="1">
                 <a:solidFill>
-                  <a:srgbClr val="1E2A6E"/>
+                  <a:srgbClr val="1E3E69"/>
                 </a:solidFill>
                 <a:latin typeface="Pretendard"/>
                 <a:ea typeface="Pretendard"/>
@@ -14418,11 +14418,11 @@
             </a:avLst>
           </a:prstGeom>
           <a:solidFill>
-            <a:srgbClr val="F6F8FD"/>
+            <a:srgbClr val="F4F7FA"/>
           </a:solidFill>
           <a:ln w="9525">
             <a:solidFill>
-              <a:srgbClr val="DEE3F0"/>
+              <a:srgbClr val="D8E1EE"/>
             </a:solidFill>
           </a:ln>
           <a:effectLst/>
@@ -14493,11 +14493,11 @@
             </a:avLst>
           </a:prstGeom>
           <a:solidFill>
-            <a:srgbClr val="F6F8FD"/>
+            <a:srgbClr val="F4F7FA"/>
           </a:solidFill>
           <a:ln w="9525">
             <a:solidFill>
-              <a:srgbClr val="DEE3F0"/>
+              <a:srgbClr val="D8E1EE"/>
             </a:solidFill>
           </a:ln>
           <a:effectLst/>
@@ -14568,11 +14568,11 @@
             </a:avLst>
           </a:prstGeom>
           <a:solidFill>
-            <a:srgbClr val="F6F8FD"/>
+            <a:srgbClr val="F4F7FA"/>
           </a:solidFill>
           <a:ln w="9525">
             <a:solidFill>
-              <a:srgbClr val="DEE3F0"/>
+              <a:srgbClr val="D8E1EE"/>
             </a:solidFill>
           </a:ln>
           <a:effectLst/>
@@ -14643,11 +14643,11 @@
             </a:avLst>
           </a:prstGeom>
           <a:solidFill>
-            <a:srgbClr val="EAF0FF"/>
+            <a:srgbClr val="E6F4EE"/>
           </a:solidFill>
           <a:ln w="9525">
             <a:solidFill>
-              <a:srgbClr val="C9D7FF"/>
+              <a:srgbClr val="C3E6D8"/>
             </a:solidFill>
           </a:ln>
           <a:effectLst/>
@@ -14690,7 +14690,7 @@
             <a:r>
               <a:rPr sz="1875" b="1">
                 <a:solidFill>
-                  <a:srgbClr val="1E2A6E"/>
+                  <a:srgbClr val="1E3E69"/>
                 </a:solidFill>
                 <a:latin typeface="Pretendard"/>
                 <a:ea typeface="Pretendard"/>
@@ -14718,11 +14718,11 @@
             </a:avLst>
           </a:prstGeom>
           <a:solidFill>
-            <a:srgbClr val="F6F8FD"/>
+            <a:srgbClr val="F4F7FA"/>
           </a:solidFill>
           <a:ln w="9525">
             <a:solidFill>
-              <a:srgbClr val="DEE3F0"/>
+              <a:srgbClr val="D8E1EE"/>
             </a:solidFill>
           </a:ln>
           <a:effectLst/>
@@ -14793,11 +14793,11 @@
             </a:avLst>
           </a:prstGeom>
           <a:solidFill>
-            <a:srgbClr val="F6F8FD"/>
+            <a:srgbClr val="F4F7FA"/>
           </a:solidFill>
           <a:ln w="9525">
             <a:solidFill>
-              <a:srgbClr val="DEE3F0"/>
+              <a:srgbClr val="D8E1EE"/>
             </a:solidFill>
           </a:ln>
           <a:effectLst/>
@@ -14868,11 +14868,11 @@
             </a:avLst>
           </a:prstGeom>
           <a:solidFill>
-            <a:srgbClr val="F6F8FD"/>
+            <a:srgbClr val="F4F7FA"/>
           </a:solidFill>
           <a:ln w="9525">
             <a:solidFill>
-              <a:srgbClr val="DEE3F0"/>
+              <a:srgbClr val="D8E1EE"/>
             </a:solidFill>
           </a:ln>
           <a:effectLst/>
@@ -14943,11 +14943,11 @@
             </a:avLst>
           </a:prstGeom>
           <a:solidFill>
-            <a:srgbClr val="EAF0FF"/>
+            <a:srgbClr val="E6F4EE"/>
           </a:solidFill>
           <a:ln w="9525">
             <a:solidFill>
-              <a:srgbClr val="C9D7FF"/>
+              <a:srgbClr val="C3E6D8"/>
             </a:solidFill>
           </a:ln>
           <a:effectLst/>
@@ -14990,7 +14990,7 @@
             <a:r>
               <a:rPr sz="1875" b="1">
                 <a:solidFill>
-                  <a:srgbClr val="1E2A6E"/>
+                  <a:srgbClr val="1E3E69"/>
                 </a:solidFill>
                 <a:latin typeface="Pretendard"/>
                 <a:ea typeface="Pretendard"/>
@@ -15018,11 +15018,11 @@
             </a:avLst>
           </a:prstGeom>
           <a:solidFill>
-            <a:srgbClr val="F6F8FD"/>
+            <a:srgbClr val="F4F7FA"/>
           </a:solidFill>
           <a:ln w="9525">
             <a:solidFill>
-              <a:srgbClr val="DEE3F0"/>
+              <a:srgbClr val="D8E1EE"/>
             </a:solidFill>
           </a:ln>
           <a:effectLst/>
@@ -15093,11 +15093,11 @@
             </a:avLst>
           </a:prstGeom>
           <a:solidFill>
-            <a:srgbClr val="F6F8FD"/>
+            <a:srgbClr val="F4F7FA"/>
           </a:solidFill>
           <a:ln w="9525">
             <a:solidFill>
-              <a:srgbClr val="DEE3F0"/>
+              <a:srgbClr val="D8E1EE"/>
             </a:solidFill>
           </a:ln>
           <a:effectLst/>
@@ -15168,11 +15168,11 @@
             </a:avLst>
           </a:prstGeom>
           <a:solidFill>
-            <a:srgbClr val="F6F8FD"/>
+            <a:srgbClr val="F4F7FA"/>
           </a:solidFill>
           <a:ln w="9525">
             <a:solidFill>
-              <a:srgbClr val="DEE3F0"/>
+              <a:srgbClr val="D8E1EE"/>
             </a:solidFill>
           </a:ln>
           <a:effectLst/>
@@ -15243,11 +15243,11 @@
             </a:avLst>
           </a:prstGeom>
           <a:solidFill>
-            <a:srgbClr val="EAF0FF"/>
+            <a:srgbClr val="E6F4EE"/>
           </a:solidFill>
           <a:ln w="9525">
             <a:solidFill>
-              <a:srgbClr val="C9D7FF"/>
+              <a:srgbClr val="C3E6D8"/>
             </a:solidFill>
           </a:ln>
           <a:effectLst/>
@@ -15290,7 +15290,7 @@
             <a:r>
               <a:rPr sz="1875" b="1">
                 <a:solidFill>
-                  <a:srgbClr val="1E2A6E"/>
+                  <a:srgbClr val="1E3E69"/>
                 </a:solidFill>
                 <a:latin typeface="Pretendard"/>
                 <a:ea typeface="Pretendard"/>
@@ -15318,11 +15318,11 @@
             </a:avLst>
           </a:prstGeom>
           <a:solidFill>
-            <a:srgbClr val="F6F8FD"/>
+            <a:srgbClr val="F4F7FA"/>
           </a:solidFill>
           <a:ln w="9525">
             <a:solidFill>
-              <a:srgbClr val="DEE3F0"/>
+              <a:srgbClr val="D8E1EE"/>
             </a:solidFill>
           </a:ln>
           <a:effectLst/>
@@ -15393,11 +15393,11 @@
             </a:avLst>
           </a:prstGeom>
           <a:solidFill>
-            <a:srgbClr val="F6F8FD"/>
+            <a:srgbClr val="F4F7FA"/>
           </a:solidFill>
           <a:ln w="9525">
             <a:solidFill>
-              <a:srgbClr val="DEE3F0"/>
+              <a:srgbClr val="D8E1EE"/>
             </a:solidFill>
           </a:ln>
           <a:effectLst/>
@@ -15468,11 +15468,11 @@
             </a:avLst>
           </a:prstGeom>
           <a:solidFill>
-            <a:srgbClr val="F6F8FD"/>
+            <a:srgbClr val="F4F7FA"/>
           </a:solidFill>
           <a:ln w="9525">
             <a:solidFill>
-              <a:srgbClr val="DEE3F0"/>
+              <a:srgbClr val="D8E1EE"/>
             </a:solidFill>
           </a:ln>
           <a:effectLst/>
@@ -15543,11 +15543,11 @@
             </a:avLst>
           </a:prstGeom>
           <a:solidFill>
-            <a:srgbClr val="EAF0FF"/>
+            <a:srgbClr val="E6F4EE"/>
           </a:solidFill>
           <a:ln w="9525">
             <a:solidFill>
-              <a:srgbClr val="C9D7FF"/>
+              <a:srgbClr val="C3E6D8"/>
             </a:solidFill>
           </a:ln>
           <a:effectLst/>
@@ -15590,7 +15590,7 @@
             <a:r>
               <a:rPr sz="1875" b="1">
                 <a:solidFill>
-                  <a:srgbClr val="1E2A6E"/>
+                  <a:srgbClr val="1E3E69"/>
                 </a:solidFill>
                 <a:latin typeface="Pretendard"/>
                 <a:ea typeface="Pretendard"/>
@@ -15618,11 +15618,11 @@
             </a:avLst>
           </a:prstGeom>
           <a:solidFill>
-            <a:srgbClr val="F6F8FD"/>
+            <a:srgbClr val="F4F7FA"/>
           </a:solidFill>
           <a:ln w="9525">
             <a:solidFill>
-              <a:srgbClr val="DEE3F0"/>
+              <a:srgbClr val="D8E1EE"/>
             </a:solidFill>
           </a:ln>
           <a:effectLst/>
@@ -15693,11 +15693,11 @@
             </a:avLst>
           </a:prstGeom>
           <a:solidFill>
-            <a:srgbClr val="F6F8FD"/>
+            <a:srgbClr val="F4F7FA"/>
           </a:solidFill>
           <a:ln w="9525">
             <a:solidFill>
-              <a:srgbClr val="DEE3F0"/>
+              <a:srgbClr val="D8E1EE"/>
             </a:solidFill>
           </a:ln>
           <a:effectLst/>
@@ -15768,11 +15768,11 @@
             </a:avLst>
           </a:prstGeom>
           <a:solidFill>
-            <a:srgbClr val="F6F8FD"/>
+            <a:srgbClr val="F4F7FA"/>
           </a:solidFill>
           <a:ln w="9525">
             <a:solidFill>
-              <a:srgbClr val="DEE3F0"/>
+              <a:srgbClr val="D8E1EE"/>
             </a:solidFill>
           </a:ln>
           <a:effectLst/>
@@ -15882,7 +15882,7 @@
             <a:avLst/>
           </a:prstGeom>
           <a:solidFill>
-            <a:srgbClr val="DEE3F0"/>
+            <a:srgbClr val="D8E1EE"/>
           </a:solidFill>
           <a:ln>
             <a:noFill/>
@@ -16012,7 +16012,7 @@
             <a:avLst/>
           </a:prstGeom>
           <a:solidFill>
-            <a:srgbClr val="F4F6FC"/>
+            <a:srgbClr val="F3F8F6"/>
           </a:solidFill>
           <a:ln>
             <a:noFill/>
@@ -16072,7 +16072,7 @@
             <a:avLst/>
           </a:prstGeom>
           <a:solidFill>
-            <a:srgbClr val="F8F8FA"/>
+            <a:srgbClr val="F8F9FA"/>
           </a:solidFill>
           <a:ln>
             <a:noFill/>
@@ -16104,7 +16104,7 @@
             </a:avLst>
           </a:prstGeom>
           <a:solidFill>
-            <a:srgbClr val="2457D6"/>
+            <a:srgbClr val="1E7F5B"/>
           </a:solidFill>
           <a:ln>
             <a:noFill/>
@@ -16220,7 +16220,7 @@
             <a:r>
               <a:rPr sz="1950" b="1" spc="160">
                 <a:solidFill>
-                  <a:srgbClr val="2457D6"/>
+                  <a:srgbClr val="1E7F5B"/>
                 </a:solidFill>
                 <a:latin typeface="Pretendard"/>
                 <a:ea typeface="Pretendard"/>
@@ -16261,7 +16261,7 @@
             <a:r>
               <a:rPr sz="5100" b="1">
                 <a:solidFill>
-                  <a:srgbClr val="1E2A6E"/>
+                  <a:srgbClr val="1E3E69"/>
                 </a:solidFill>
                 <a:latin typeface="Pretendard"/>
                 <a:ea typeface="Pretendard"/>
@@ -16287,7 +16287,7 @@
             <a:avLst/>
           </a:prstGeom>
           <a:solidFill>
-            <a:srgbClr val="1E2A6E"/>
+            <a:srgbClr val="1E3E69"/>
           </a:solidFill>
           <a:ln>
             <a:noFill/>
@@ -16332,7 +16332,7 @@
             <a:r>
               <a:rPr sz="2250" b="1">
                 <a:solidFill>
-                  <a:srgbClr val="2457D6"/>
+                  <a:srgbClr val="1E7F5B"/>
                 </a:solidFill>
                 <a:latin typeface="Pretendard"/>
                 <a:ea typeface="Pretendard"/>
@@ -16360,11 +16360,11 @@
             </a:avLst>
           </a:prstGeom>
           <a:solidFill>
-            <a:srgbClr val="F6F8FD"/>
+            <a:srgbClr val="F4F7FA"/>
           </a:solidFill>
           <a:ln w="9525">
             <a:solidFill>
-              <a:srgbClr val="DEE3F0"/>
+              <a:srgbClr val="D8E1EE"/>
             </a:solidFill>
           </a:ln>
           <a:effectLst/>
@@ -16392,7 +16392,7 @@
             <a:avLst/>
           </a:prstGeom>
           <a:solidFill>
-            <a:srgbClr val="1E2A6E"/>
+            <a:srgbClr val="1E3E69"/>
           </a:solidFill>
           <a:ln>
             <a:noFill/>
@@ -16478,7 +16478,7 @@
             <a:r>
               <a:rPr sz="2700" b="1">
                 <a:solidFill>
-                  <a:srgbClr val="1E2A6E"/>
+                  <a:srgbClr val="1E3E69"/>
                 </a:solidFill>
                 <a:latin typeface="Pretendard"/>
                 <a:ea typeface="Pretendard"/>
@@ -16504,7 +16504,7 @@
             <a:avLst/>
           </a:prstGeom>
           <a:solidFill>
-            <a:srgbClr val="2457D6"/>
+            <a:srgbClr val="1E7F5B"/>
           </a:solidFill>
           <a:ln>
             <a:noFill/>
@@ -16549,7 +16549,7 @@
             <a:r>
               <a:rPr sz="1875" b="1" spc="150">
                 <a:solidFill>
-                  <a:srgbClr val="2457D6"/>
+                  <a:srgbClr val="1E7F5B"/>
                 </a:solidFill>
                 <a:latin typeface="Pretendard"/>
                 <a:ea typeface="Pretendard"/>
@@ -16590,7 +16590,7 @@
             <a:r>
               <a:rPr sz="2475" b="1">
                 <a:solidFill>
-                  <a:srgbClr val="1E2A6E"/>
+                  <a:srgbClr val="1E3E69"/>
                 </a:solidFill>
                 <a:latin typeface="Pretendard"/>
                 <a:ea typeface="Pretendard"/>
@@ -16616,7 +16616,7 @@
             <a:avLst/>
           </a:prstGeom>
           <a:solidFill>
-            <a:srgbClr val="DEE3F0"/>
+            <a:srgbClr val="D8E1EE"/>
           </a:solidFill>
           <a:ln>
             <a:noFill/>
@@ -16746,7 +16746,7 @@
             <a:avLst/>
           </a:prstGeom>
           <a:solidFill>
-            <a:srgbClr val="F4F6FC"/>
+            <a:srgbClr val="F3F8F6"/>
           </a:solidFill>
           <a:ln>
             <a:noFill/>
@@ -16806,7 +16806,7 @@
             <a:avLst/>
           </a:prstGeom>
           <a:solidFill>
-            <a:srgbClr val="F8F8FA"/>
+            <a:srgbClr val="F8F9FA"/>
           </a:solidFill>
           <a:ln>
             <a:noFill/>
@@ -16838,7 +16838,7 @@
             </a:avLst>
           </a:prstGeom>
           <a:solidFill>
-            <a:srgbClr val="2457D6"/>
+            <a:srgbClr val="1E7F5B"/>
           </a:solidFill>
           <a:ln>
             <a:noFill/>
@@ -16954,7 +16954,7 @@
             <a:r>
               <a:rPr sz="1950" b="1" spc="160">
                 <a:solidFill>
-                  <a:srgbClr val="2457D6"/>
+                  <a:srgbClr val="1E7F5B"/>
                 </a:solidFill>
                 <a:latin typeface="Pretendard"/>
                 <a:ea typeface="Pretendard"/>
@@ -16995,7 +16995,7 @@
             <a:r>
               <a:rPr sz="5100" b="1">
                 <a:solidFill>
-                  <a:srgbClr val="1E2A6E"/>
+                  <a:srgbClr val="1E3E69"/>
                 </a:solidFill>
                 <a:latin typeface="Pretendard"/>
                 <a:ea typeface="Pretendard"/>
@@ -17021,7 +17021,7 @@
             <a:avLst/>
           </a:prstGeom>
           <a:solidFill>
-            <a:srgbClr val="1E2A6E"/>
+            <a:srgbClr val="1E3E69"/>
           </a:solidFill>
           <a:ln>
             <a:noFill/>
@@ -17053,11 +17053,11 @@
             </a:avLst>
           </a:prstGeom>
           <a:solidFill>
-            <a:srgbClr val="F6F8FD"/>
+            <a:srgbClr val="F4F7FA"/>
           </a:solidFill>
           <a:ln w="9525">
             <a:solidFill>
-              <a:srgbClr val="DEE3F0"/>
+              <a:srgbClr val="D8E1EE"/>
             </a:solidFill>
           </a:ln>
           <a:effectLst/>
@@ -17085,7 +17085,7 @@
             <a:avLst/>
           </a:prstGeom>
           <a:solidFill>
-            <a:srgbClr val="1E2A6E"/>
+            <a:srgbClr val="1E3E69"/>
           </a:solidFill>
           <a:ln>
             <a:noFill/>
@@ -17130,7 +17130,7 @@
             <a:r>
               <a:rPr sz="2100" b="1">
                 <a:solidFill>
-                  <a:srgbClr val="1E2A6E"/>
+                  <a:srgbClr val="1E3E69"/>
                 </a:solidFill>
                 <a:latin typeface="Pretendard"/>
                 <a:ea typeface="Pretendard"/>
@@ -17181,7 +17181,7 @@
           </a:solidFill>
           <a:ln w="9525">
             <a:solidFill>
-              <a:srgbClr val="DEE3F0"/>
+              <a:srgbClr val="D8E1EE"/>
             </a:solidFill>
           </a:ln>
           <a:effectLst/>
@@ -17211,11 +17211,11 @@
             </a:avLst>
           </a:prstGeom>
           <a:solidFill>
-            <a:srgbClr val="F6F8FD"/>
+            <a:srgbClr val="F4F7FA"/>
           </a:solidFill>
           <a:ln w="9525">
             <a:solidFill>
-              <a:srgbClr val="DEE3F0"/>
+              <a:srgbClr val="D8E1EE"/>
             </a:solidFill>
           </a:ln>
           <a:effectLst/>
@@ -17243,7 +17243,7 @@
             <a:avLst/>
           </a:prstGeom>
           <a:solidFill>
-            <a:srgbClr val="1E2A6E"/>
+            <a:srgbClr val="1E3E69"/>
           </a:solidFill>
           <a:ln>
             <a:noFill/>
@@ -17288,7 +17288,7 @@
             <a:r>
               <a:rPr sz="2100" b="1">
                 <a:solidFill>
-                  <a:srgbClr val="1E2A6E"/>
+                  <a:srgbClr val="1E3E69"/>
                 </a:solidFill>
                 <a:latin typeface="Pretendard"/>
                 <a:ea typeface="Pretendard"/>
@@ -17339,7 +17339,7 @@
           </a:solidFill>
           <a:ln w="9525">
             <a:solidFill>
-              <a:srgbClr val="DEE3F0"/>
+              <a:srgbClr val="D8E1EE"/>
             </a:solidFill>
           </a:ln>
           <a:effectLst/>
@@ -17369,11 +17369,11 @@
             </a:avLst>
           </a:prstGeom>
           <a:solidFill>
-            <a:srgbClr val="F6F8FD"/>
+            <a:srgbClr val="F4F7FA"/>
           </a:solidFill>
           <a:ln w="9525">
             <a:solidFill>
-              <a:srgbClr val="DEE3F0"/>
+              <a:srgbClr val="D8E1EE"/>
             </a:solidFill>
           </a:ln>
           <a:effectLst/>
@@ -17401,7 +17401,7 @@
             <a:avLst/>
           </a:prstGeom>
           <a:solidFill>
-            <a:srgbClr val="1E2A6E"/>
+            <a:srgbClr val="1E3E69"/>
           </a:solidFill>
           <a:ln>
             <a:noFill/>
@@ -17446,7 +17446,7 @@
             <a:r>
               <a:rPr sz="2100" b="1">
                 <a:solidFill>
-                  <a:srgbClr val="1E2A6E"/>
+                  <a:srgbClr val="1E3E69"/>
                 </a:solidFill>
                 <a:latin typeface="Pretendard"/>
                 <a:ea typeface="Pretendard"/>
@@ -17497,7 +17497,7 @@
           </a:solidFill>
           <a:ln w="9525">
             <a:solidFill>
-              <a:srgbClr val="DEE3F0"/>
+              <a:srgbClr val="D8E1EE"/>
             </a:solidFill>
           </a:ln>
           <a:effectLst/>
@@ -17527,11 +17527,11 @@
             </a:avLst>
           </a:prstGeom>
           <a:solidFill>
-            <a:srgbClr val="F6F8FD"/>
+            <a:srgbClr val="F4F7FA"/>
           </a:solidFill>
           <a:ln w="9525">
             <a:solidFill>
-              <a:srgbClr val="DEE3F0"/>
+              <a:srgbClr val="D8E1EE"/>
             </a:solidFill>
           </a:ln>
           <a:effectLst/>
@@ -17559,7 +17559,7 @@
             <a:avLst/>
           </a:prstGeom>
           <a:solidFill>
-            <a:srgbClr val="1E2A6E"/>
+            <a:srgbClr val="1E3E69"/>
           </a:solidFill>
           <a:ln>
             <a:noFill/>
@@ -17604,7 +17604,7 @@
             <a:r>
               <a:rPr sz="2100" b="1">
                 <a:solidFill>
-                  <a:srgbClr val="1E2A6E"/>
+                  <a:srgbClr val="1E3E69"/>
                 </a:solidFill>
                 <a:latin typeface="Pretendard"/>
                 <a:ea typeface="Pretendard"/>
@@ -17655,7 +17655,7 @@
           </a:solidFill>
           <a:ln w="9525">
             <a:solidFill>
-              <a:srgbClr val="DEE3F0"/>
+              <a:srgbClr val="D8E1EE"/>
             </a:solidFill>
           </a:ln>
           <a:effectLst/>
@@ -17683,7 +17683,7 @@
             <a:avLst/>
           </a:prstGeom>
           <a:solidFill>
-            <a:srgbClr val="C9D7FF"/>
+            <a:srgbClr val="C3E6D8"/>
           </a:solidFill>
           <a:ln>
             <a:noFill/>
@@ -17754,7 +17754,7 @@
             <a:avLst/>
           </a:prstGeom>
           <a:solidFill>
-            <a:srgbClr val="DEE3F0"/>
+            <a:srgbClr val="D8E1EE"/>
           </a:solidFill>
           <a:ln>
             <a:noFill/>
@@ -17884,7 +17884,7 @@
             <a:avLst/>
           </a:prstGeom>
           <a:solidFill>
-            <a:srgbClr val="F4F6FC"/>
+            <a:srgbClr val="F3F8F6"/>
           </a:solidFill>
           <a:ln>
             <a:noFill/>
@@ -17944,7 +17944,7 @@
             <a:avLst/>
           </a:prstGeom>
           <a:solidFill>
-            <a:srgbClr val="F8F8FA"/>
+            <a:srgbClr val="F8F9FA"/>
           </a:solidFill>
           <a:ln>
             <a:noFill/>
@@ -17989,7 +17989,7 @@
             <a:r>
               <a:rPr sz="1950" b="1" spc="160">
                 <a:solidFill>
-                  <a:srgbClr val="2457D6"/>
+                  <a:srgbClr val="1E7F5B"/>
                 </a:solidFill>
                 <a:latin typeface="Pretendard"/>
                 <a:ea typeface="Pretendard"/>
@@ -18030,7 +18030,7 @@
             <a:r>
               <a:rPr sz="5100" b="1">
                 <a:solidFill>
-                  <a:srgbClr val="1E2A6E"/>
+                  <a:srgbClr val="1E3E69"/>
                 </a:solidFill>
                 <a:latin typeface="Pretendard"/>
                 <a:ea typeface="Pretendard"/>
@@ -18056,7 +18056,7 @@
             <a:avLst/>
           </a:prstGeom>
           <a:solidFill>
-            <a:srgbClr val="1E2A6E"/>
+            <a:srgbClr val="1E3E69"/>
           </a:solidFill>
           <a:ln>
             <a:noFill/>
@@ -18088,11 +18088,11 @@
             </a:avLst>
           </a:prstGeom>
           <a:solidFill>
-            <a:srgbClr val="F6F8FD"/>
+            <a:srgbClr val="F4F7FA"/>
           </a:solidFill>
           <a:ln w="9525">
             <a:solidFill>
-              <a:srgbClr val="DEE3F0"/>
+              <a:srgbClr val="D8E1EE"/>
             </a:solidFill>
           </a:ln>
           <a:effectLst/>
@@ -18126,7 +18126,7 @@
           </a:solidFill>
           <a:ln w="28575">
             <a:solidFill>
-              <a:srgbClr val="1E2A6E"/>
+              <a:srgbClr val="1E3E69"/>
             </a:solidFill>
           </a:ln>
           <a:effectLst/>
@@ -18169,7 +18169,7 @@
             <a:r>
               <a:rPr sz="2400" b="1">
                 <a:solidFill>
-                  <a:srgbClr val="1E2A6E"/>
+                  <a:srgbClr val="1E3E69"/>
                 </a:solidFill>
                 <a:latin typeface="Pretendard"/>
                 <a:ea typeface="Pretendard"/>
@@ -18197,11 +18197,11 @@
             </a:avLst>
           </a:prstGeom>
           <a:solidFill>
-            <a:srgbClr val="F6F8FD"/>
+            <a:srgbClr val="F4F7FA"/>
           </a:solidFill>
           <a:ln w="9525">
             <a:solidFill>
-              <a:srgbClr val="DEE3F0"/>
+              <a:srgbClr val="D8E1EE"/>
             </a:solidFill>
           </a:ln>
           <a:effectLst/>
@@ -18235,7 +18235,7 @@
           </a:solidFill>
           <a:ln w="28575">
             <a:solidFill>
-              <a:srgbClr val="1E2A6E"/>
+              <a:srgbClr val="1E3E69"/>
             </a:solidFill>
           </a:ln>
           <a:effectLst/>
@@ -18278,7 +18278,7 @@
             <a:r>
               <a:rPr sz="2400" b="1">
                 <a:solidFill>
-                  <a:srgbClr val="1E2A6E"/>
+                  <a:srgbClr val="1E3E69"/>
                 </a:solidFill>
                 <a:latin typeface="Pretendard"/>
                 <a:ea typeface="Pretendard"/>
@@ -18306,11 +18306,11 @@
             </a:avLst>
           </a:prstGeom>
           <a:solidFill>
-            <a:srgbClr val="F6F8FD"/>
+            <a:srgbClr val="F4F7FA"/>
           </a:solidFill>
           <a:ln w="9525">
             <a:solidFill>
-              <a:srgbClr val="DEE3F0"/>
+              <a:srgbClr val="D8E1EE"/>
             </a:solidFill>
           </a:ln>
           <a:effectLst/>
@@ -18344,7 +18344,7 @@
           </a:solidFill>
           <a:ln w="28575">
             <a:solidFill>
-              <a:srgbClr val="1E2A6E"/>
+              <a:srgbClr val="1E3E69"/>
             </a:solidFill>
           </a:ln>
           <a:effectLst/>
@@ -18387,7 +18387,7 @@
             <a:r>
               <a:rPr sz="2400" b="1">
                 <a:solidFill>
-                  <a:srgbClr val="1E2A6E"/>
+                  <a:srgbClr val="1E3E69"/>
                 </a:solidFill>
                 <a:latin typeface="Pretendard"/>
                 <a:ea typeface="Pretendard"/>
@@ -18415,11 +18415,11 @@
             </a:avLst>
           </a:prstGeom>
           <a:solidFill>
-            <a:srgbClr val="F6F8FD"/>
+            <a:srgbClr val="F4F7FA"/>
           </a:solidFill>
           <a:ln w="9525">
             <a:solidFill>
-              <a:srgbClr val="DEE3F0"/>
+              <a:srgbClr val="D8E1EE"/>
             </a:solidFill>
           </a:ln>
           <a:effectLst/>
@@ -18453,7 +18453,7 @@
           </a:solidFill>
           <a:ln w="28575">
             <a:solidFill>
-              <a:srgbClr val="1E2A6E"/>
+              <a:srgbClr val="1E3E69"/>
             </a:solidFill>
           </a:ln>
           <a:effectLst/>
@@ -18496,7 +18496,7 @@
             <a:r>
               <a:rPr sz="2400" b="1">
                 <a:solidFill>
-                  <a:srgbClr val="1E2A6E"/>
+                  <a:srgbClr val="1E3E69"/>
                 </a:solidFill>
                 <a:latin typeface="Pretendard"/>
                 <a:ea typeface="Pretendard"/>
@@ -18524,11 +18524,11 @@
             </a:avLst>
           </a:prstGeom>
           <a:solidFill>
-            <a:srgbClr val="F6F8FD"/>
+            <a:srgbClr val="F4F7FA"/>
           </a:solidFill>
           <a:ln w="9525">
             <a:solidFill>
-              <a:srgbClr val="DEE3F0"/>
+              <a:srgbClr val="D8E1EE"/>
             </a:solidFill>
           </a:ln>
           <a:effectLst/>
@@ -18562,7 +18562,7 @@
           </a:solidFill>
           <a:ln w="28575">
             <a:solidFill>
-              <a:srgbClr val="1E2A6E"/>
+              <a:srgbClr val="1E3E69"/>
             </a:solidFill>
           </a:ln>
           <a:effectLst/>
@@ -18605,7 +18605,7 @@
             <a:r>
               <a:rPr sz="2400" b="1">
                 <a:solidFill>
-                  <a:srgbClr val="1E2A6E"/>
+                  <a:srgbClr val="1E3E69"/>
                 </a:solidFill>
                 <a:latin typeface="Pretendard"/>
                 <a:ea typeface="Pretendard"/>
@@ -18631,7 +18631,7 @@
             <a:avLst/>
           </a:prstGeom>
           <a:solidFill>
-            <a:srgbClr val="DEE3F0"/>
+            <a:srgbClr val="D8E1EE"/>
           </a:solidFill>
           <a:ln>
             <a:noFill/>
@@ -18761,7 +18761,7 @@
             <a:avLst/>
           </a:prstGeom>
           <a:solidFill>
-            <a:srgbClr val="F4F6FC"/>
+            <a:srgbClr val="F3F8F6"/>
           </a:solidFill>
           <a:ln>
             <a:noFill/>
@@ -18821,7 +18821,7 @@
             <a:avLst/>
           </a:prstGeom>
           <a:solidFill>
-            <a:srgbClr val="F8F8FA"/>
+            <a:srgbClr val="F8F9FA"/>
           </a:solidFill>
           <a:ln>
             <a:noFill/>
@@ -18866,7 +18866,7 @@
             <a:r>
               <a:rPr sz="1950" b="1" spc="160">
                 <a:solidFill>
-                  <a:srgbClr val="2457D6"/>
+                  <a:srgbClr val="1E7F5B"/>
                 </a:solidFill>
                 <a:latin typeface="Pretendard"/>
                 <a:ea typeface="Pretendard"/>
@@ -18907,7 +18907,7 @@
             <a:r>
               <a:rPr sz="5100" b="1">
                 <a:solidFill>
-                  <a:srgbClr val="1E2A6E"/>
+                  <a:srgbClr val="1E3E69"/>
                 </a:solidFill>
                 <a:latin typeface="Pretendard"/>
                 <a:ea typeface="Pretendard"/>
@@ -18933,7 +18933,7 @@
             <a:avLst/>
           </a:prstGeom>
           <a:solidFill>
-            <a:srgbClr val="1E2A6E"/>
+            <a:srgbClr val="1E3E69"/>
           </a:solidFill>
           <a:ln>
             <a:noFill/>
@@ -18965,11 +18965,11 @@
             </a:avLst>
           </a:prstGeom>
           <a:solidFill>
-            <a:srgbClr val="F6F8FD"/>
+            <a:srgbClr val="F4F7FA"/>
           </a:solidFill>
           <a:ln w="9525">
             <a:solidFill>
-              <a:srgbClr val="DEE3F0"/>
+              <a:srgbClr val="D8E1EE"/>
             </a:solidFill>
           </a:ln>
           <a:effectLst/>
@@ -18997,7 +18997,7 @@
             <a:avLst/>
           </a:prstGeom>
           <a:solidFill>
-            <a:srgbClr val="1E2A6E"/>
+            <a:srgbClr val="1E3E69"/>
           </a:solidFill>
           <a:ln>
             <a:noFill/>
@@ -19083,7 +19083,7 @@
             <a:r>
               <a:rPr sz="2325" b="1">
                 <a:solidFill>
-                  <a:srgbClr val="1E2A6E"/>
+                  <a:srgbClr val="1E3E69"/>
                 </a:solidFill>
                 <a:latin typeface="Pretendard"/>
                 <a:ea typeface="Pretendard"/>
@@ -19111,11 +19111,11 @@
             </a:avLst>
           </a:prstGeom>
           <a:solidFill>
-            <a:srgbClr val="F6F8FD"/>
+            <a:srgbClr val="F4F7FA"/>
           </a:solidFill>
           <a:ln w="9525">
             <a:solidFill>
-              <a:srgbClr val="DEE3F0"/>
+              <a:srgbClr val="D8E1EE"/>
             </a:solidFill>
           </a:ln>
           <a:effectLst/>
@@ -19143,7 +19143,7 @@
             <a:avLst/>
           </a:prstGeom>
           <a:solidFill>
-            <a:srgbClr val="1E2A6E"/>
+            <a:srgbClr val="1E3E69"/>
           </a:solidFill>
           <a:ln>
             <a:noFill/>
@@ -19229,7 +19229,7 @@
             <a:r>
               <a:rPr sz="2325" b="1">
                 <a:solidFill>
-                  <a:srgbClr val="1E2A6E"/>
+                  <a:srgbClr val="1E3E69"/>
                 </a:solidFill>
                 <a:latin typeface="Pretendard"/>
                 <a:ea typeface="Pretendard"/>
@@ -19257,11 +19257,11 @@
             </a:avLst>
           </a:prstGeom>
           <a:solidFill>
-            <a:srgbClr val="F6F8FD"/>
+            <a:srgbClr val="F4F7FA"/>
           </a:solidFill>
           <a:ln w="9525">
             <a:solidFill>
-              <a:srgbClr val="DEE3F0"/>
+              <a:srgbClr val="D8E1EE"/>
             </a:solidFill>
           </a:ln>
           <a:effectLst/>
@@ -19289,7 +19289,7 @@
             <a:avLst/>
           </a:prstGeom>
           <a:solidFill>
-            <a:srgbClr val="1E2A6E"/>
+            <a:srgbClr val="1E3E69"/>
           </a:solidFill>
           <a:ln>
             <a:noFill/>
@@ -19375,7 +19375,7 @@
             <a:r>
               <a:rPr sz="2325" b="1">
                 <a:solidFill>
-                  <a:srgbClr val="1E2A6E"/>
+                  <a:srgbClr val="1E3E69"/>
                 </a:solidFill>
                 <a:latin typeface="Pretendard"/>
                 <a:ea typeface="Pretendard"/>
@@ -19403,11 +19403,11 @@
             </a:avLst>
           </a:prstGeom>
           <a:solidFill>
-            <a:srgbClr val="F6F8FD"/>
+            <a:srgbClr val="F4F7FA"/>
           </a:solidFill>
           <a:ln w="9525">
             <a:solidFill>
-              <a:srgbClr val="DEE3F0"/>
+              <a:srgbClr val="D8E1EE"/>
             </a:solidFill>
           </a:ln>
           <a:effectLst/>
@@ -19435,7 +19435,7 @@
             <a:avLst/>
           </a:prstGeom>
           <a:solidFill>
-            <a:srgbClr val="1E2A6E"/>
+            <a:srgbClr val="1E3E69"/>
           </a:solidFill>
           <a:ln>
             <a:noFill/>
@@ -19521,7 +19521,7 @@
             <a:r>
               <a:rPr sz="2325" b="1">
                 <a:solidFill>
-                  <a:srgbClr val="1E2A6E"/>
+                  <a:srgbClr val="1E3E69"/>
                 </a:solidFill>
                 <a:latin typeface="Pretendard"/>
                 <a:ea typeface="Pretendard"/>
@@ -19549,11 +19549,11 @@
             </a:avLst>
           </a:prstGeom>
           <a:solidFill>
-            <a:srgbClr val="EAF0FF"/>
+            <a:srgbClr val="E6F4EE"/>
           </a:solidFill>
           <a:ln w="9525">
             <a:solidFill>
-              <a:srgbClr val="C9D7FF"/>
+              <a:srgbClr val="C3E6D8"/>
             </a:solidFill>
           </a:ln>
           <a:effectLst/>
@@ -19596,7 +19596,7 @@
             <a:r>
               <a:rPr sz="2475" b="1">
                 <a:solidFill>
-                  <a:srgbClr val="1E2A6E"/>
+                  <a:srgbClr val="1E3E69"/>
                 </a:solidFill>
                 <a:latin typeface="Pretendard"/>
                 <a:ea typeface="Pretendard"/>
@@ -19622,7 +19622,7 @@
             <a:avLst/>
           </a:prstGeom>
           <a:solidFill>
-            <a:srgbClr val="DEE3F0"/>
+            <a:srgbClr val="D8E1EE"/>
           </a:solidFill>
           <a:ln>
             <a:noFill/>
@@ -19752,7 +19752,7 @@
             <a:avLst/>
           </a:prstGeom>
           <a:solidFill>
-            <a:srgbClr val="F4F6FC"/>
+            <a:srgbClr val="F3F8F6"/>
           </a:solidFill>
           <a:ln>
             <a:noFill/>
@@ -19782,7 +19782,7 @@
             <a:avLst/>
           </a:prstGeom>
           <a:solidFill>
-            <a:srgbClr val="F6F6F9"/>
+            <a:srgbClr val="F6F7F9"/>
           </a:solidFill>
           <a:ln>
             <a:noFill/>
@@ -19812,7 +19812,7 @@
             <a:avLst/>
           </a:prstGeom>
           <a:solidFill>
-            <a:srgbClr val="1E2A6E"/>
+            <a:srgbClr val="1E3E69"/>
           </a:solidFill>
           <a:ln>
             <a:noFill/>
@@ -19857,7 +19857,7 @@
             <a:r>
               <a:rPr sz="2400" b="1">
                 <a:solidFill>
-                  <a:srgbClr val="2457D6"/>
+                  <a:srgbClr val="1E7F5B"/>
                 </a:solidFill>
                 <a:latin typeface="Pretendard"/>
                 <a:ea typeface="Pretendard"/>
@@ -19898,7 +19898,7 @@
             <a:r>
               <a:rPr sz="5100" b="1">
                 <a:solidFill>
-                  <a:srgbClr val="1E2A6E"/>
+                  <a:srgbClr val="1E3E69"/>
                 </a:solidFill>
                 <a:latin typeface="Pretendard"/>
                 <a:ea typeface="Pretendard"/>
@@ -19967,11 +19967,11 @@
             </a:avLst>
           </a:prstGeom>
           <a:solidFill>
-            <a:srgbClr val="F6F8FD"/>
+            <a:srgbClr val="F4F7FA"/>
           </a:solidFill>
           <a:ln w="9525">
             <a:solidFill>
-              <a:srgbClr val="DEE3F0"/>
+              <a:srgbClr val="D8E1EE"/>
             </a:solidFill>
           </a:ln>
           <a:effectLst/>
@@ -20014,7 +20014,7 @@
             <a:r>
               <a:rPr sz="2475" b="1">
                 <a:solidFill>
-                  <a:srgbClr val="2457D6"/>
+                  <a:srgbClr val="1E7F5B"/>
                 </a:solidFill>
                 <a:latin typeface="Pretendard"/>
                 <a:ea typeface="Pretendard"/>
@@ -20055,7 +20055,7 @@
             <a:r>
               <a:rPr sz="2475" b="1">
                 <a:solidFill>
-                  <a:srgbClr val="1E2A6E"/>
+                  <a:srgbClr val="1E3E69"/>
                 </a:solidFill>
                 <a:latin typeface="Pretendard"/>
                 <a:ea typeface="Pretendard"/>
@@ -20083,11 +20083,11 @@
             </a:avLst>
           </a:prstGeom>
           <a:solidFill>
-            <a:srgbClr val="F6F8FD"/>
+            <a:srgbClr val="F4F7FA"/>
           </a:solidFill>
           <a:ln w="9525">
             <a:solidFill>
-              <a:srgbClr val="DEE3F0"/>
+              <a:srgbClr val="D8E1EE"/>
             </a:solidFill>
           </a:ln>
           <a:effectLst/>
@@ -20130,7 +20130,7 @@
             <a:r>
               <a:rPr sz="2475" b="1">
                 <a:solidFill>
-                  <a:srgbClr val="2457D6"/>
+                  <a:srgbClr val="1E7F5B"/>
                 </a:solidFill>
                 <a:latin typeface="Pretendard"/>
                 <a:ea typeface="Pretendard"/>
@@ -20171,7 +20171,7 @@
             <a:r>
               <a:rPr sz="2475" b="1">
                 <a:solidFill>
-                  <a:srgbClr val="1E2A6E"/>
+                  <a:srgbClr val="1E3E69"/>
                 </a:solidFill>
                 <a:latin typeface="Pretendard"/>
                 <a:ea typeface="Pretendard"/>
@@ -20199,11 +20199,11 @@
             </a:avLst>
           </a:prstGeom>
           <a:solidFill>
-            <a:srgbClr val="F6F8FD"/>
+            <a:srgbClr val="F4F7FA"/>
           </a:solidFill>
           <a:ln w="9525">
             <a:solidFill>
-              <a:srgbClr val="DEE3F0"/>
+              <a:srgbClr val="D8E1EE"/>
             </a:solidFill>
           </a:ln>
           <a:effectLst/>
@@ -20246,7 +20246,7 @@
             <a:r>
               <a:rPr sz="2475" b="1">
                 <a:solidFill>
-                  <a:srgbClr val="2457D6"/>
+                  <a:srgbClr val="1E7F5B"/>
                 </a:solidFill>
                 <a:latin typeface="Pretendard"/>
                 <a:ea typeface="Pretendard"/>
@@ -20287,7 +20287,7 @@
             <a:r>
               <a:rPr sz="2475" b="1">
                 <a:solidFill>
-                  <a:srgbClr val="1E2A6E"/>
+                  <a:srgbClr val="1E3E69"/>
                 </a:solidFill>
                 <a:latin typeface="Pretendard"/>
                 <a:ea typeface="Pretendard"/>
@@ -20315,11 +20315,11 @@
             </a:avLst>
           </a:prstGeom>
           <a:solidFill>
-            <a:srgbClr val="F6F8FD"/>
+            <a:srgbClr val="F4F7FA"/>
           </a:solidFill>
           <a:ln w="9525">
             <a:solidFill>
-              <a:srgbClr val="DEE3F0"/>
+              <a:srgbClr val="D8E1EE"/>
             </a:solidFill>
           </a:ln>
           <a:effectLst/>
@@ -20362,7 +20362,7 @@
             <a:r>
               <a:rPr sz="2475" b="1">
                 <a:solidFill>
-                  <a:srgbClr val="2457D6"/>
+                  <a:srgbClr val="1E7F5B"/>
                 </a:solidFill>
                 <a:latin typeface="Pretendard"/>
                 <a:ea typeface="Pretendard"/>
@@ -20403,7 +20403,7 @@
             <a:r>
               <a:rPr sz="2475" b="1">
                 <a:solidFill>
-                  <a:srgbClr val="1E2A6E"/>
+                  <a:srgbClr val="1E3E69"/>
                 </a:solidFill>
                 <a:latin typeface="Pretendard"/>
                 <a:ea typeface="Pretendard"/>
@@ -20429,7 +20429,7 @@
             <a:avLst/>
           </a:prstGeom>
           <a:solidFill>
-            <a:srgbClr val="2457D6"/>
+            <a:srgbClr val="1E7F5B"/>
           </a:solidFill>
           <a:ln>
             <a:noFill/>
@@ -20474,7 +20474,7 @@
             <a:r>
               <a:rPr sz="1800" b="1" spc="140">
                 <a:solidFill>
-                  <a:srgbClr val="2457D6"/>
+                  <a:srgbClr val="1E7F5B"/>
                 </a:solidFill>
                 <a:latin typeface="Pretendard"/>
                 <a:ea typeface="Pretendard"/>
@@ -20515,7 +20515,7 @@
             <a:r>
               <a:rPr sz="2400" b="1">
                 <a:solidFill>
-                  <a:srgbClr val="1E2A6E"/>
+                  <a:srgbClr val="1E3E69"/>
                 </a:solidFill>
                 <a:latin typeface="Pretendard"/>
                 <a:ea typeface="Pretendard"/>
@@ -20559,7 +20559,7 @@
             <a:avLst/>
           </a:prstGeom>
           <a:solidFill>
-            <a:srgbClr val="F4F6FC"/>
+            <a:srgbClr val="F3F8F6"/>
           </a:solidFill>
           <a:ln>
             <a:noFill/>
@@ -20619,7 +20619,7 @@
             <a:avLst/>
           </a:prstGeom>
           <a:solidFill>
-            <a:srgbClr val="F8F8FA"/>
+            <a:srgbClr val="F8F9FA"/>
           </a:solidFill>
           <a:ln>
             <a:noFill/>
@@ -20664,7 +20664,7 @@
             <a:r>
               <a:rPr sz="1950" b="1" spc="160">
                 <a:solidFill>
-                  <a:srgbClr val="2457D6"/>
+                  <a:srgbClr val="1E7F5B"/>
                 </a:solidFill>
                 <a:latin typeface="Pretendard"/>
                 <a:ea typeface="Pretendard"/>
@@ -20705,7 +20705,7 @@
             <a:r>
               <a:rPr sz="5100" b="1">
                 <a:solidFill>
-                  <a:srgbClr val="1E2A6E"/>
+                  <a:srgbClr val="1E3E69"/>
                 </a:solidFill>
                 <a:latin typeface="Pretendard"/>
                 <a:ea typeface="Pretendard"/>
@@ -20731,7 +20731,7 @@
             <a:avLst/>
           </a:prstGeom>
           <a:solidFill>
-            <a:srgbClr val="1E2A6E"/>
+            <a:srgbClr val="1E3E69"/>
           </a:solidFill>
           <a:ln>
             <a:noFill/>
@@ -20804,11 +20804,11 @@
             </a:avLst>
           </a:prstGeom>
           <a:solidFill>
-            <a:srgbClr val="F6F8FD"/>
+            <a:srgbClr val="F4F7FA"/>
           </a:solidFill>
           <a:ln w="9525">
             <a:solidFill>
-              <a:srgbClr val="DEE3F0"/>
+              <a:srgbClr val="D8E1EE"/>
             </a:solidFill>
           </a:ln>
           <a:effectLst/>
@@ -20836,7 +20836,7 @@
             <a:avLst/>
           </a:prstGeom>
           <a:solidFill>
-            <a:srgbClr val="1E2A6E"/>
+            <a:srgbClr val="1E3E69"/>
           </a:solidFill>
           <a:ln>
             <a:noFill/>
@@ -20968,11 +20968,11 @@
             </a:avLst>
           </a:prstGeom>
           <a:solidFill>
-            <a:srgbClr val="F6F8FD"/>
+            <a:srgbClr val="F4F7FA"/>
           </a:solidFill>
           <a:ln w="9525">
             <a:solidFill>
-              <a:srgbClr val="DEE3F0"/>
+              <a:srgbClr val="D8E1EE"/>
             </a:solidFill>
           </a:ln>
           <a:effectLst/>
@@ -21000,7 +21000,7 @@
             <a:avLst/>
           </a:prstGeom>
           <a:solidFill>
-            <a:srgbClr val="2457D6"/>
+            <a:srgbClr val="1E7F5B"/>
           </a:solidFill>
           <a:ln>
             <a:noFill/>
@@ -21132,11 +21132,11 @@
             </a:avLst>
           </a:prstGeom>
           <a:solidFill>
-            <a:srgbClr val="F6F8FD"/>
+            <a:srgbClr val="F4F7FA"/>
           </a:solidFill>
           <a:ln w="9525">
             <a:solidFill>
-              <a:srgbClr val="DEE3F0"/>
+              <a:srgbClr val="D8E1EE"/>
             </a:solidFill>
           </a:ln>
           <a:effectLst/>
@@ -21164,7 +21164,7 @@
             <a:avLst/>
           </a:prstGeom>
           <a:solidFill>
-            <a:srgbClr val="1E2A6E"/>
+            <a:srgbClr val="1E3E69"/>
           </a:solidFill>
           <a:ln>
             <a:noFill/>
@@ -21296,11 +21296,11 @@
             </a:avLst>
           </a:prstGeom>
           <a:solidFill>
-            <a:srgbClr val="F6F8FD"/>
+            <a:srgbClr val="F4F7FA"/>
           </a:solidFill>
           <a:ln w="9525">
             <a:solidFill>
-              <a:srgbClr val="DEE3F0"/>
+              <a:srgbClr val="D8E1EE"/>
             </a:solidFill>
           </a:ln>
           <a:effectLst/>
@@ -21328,7 +21328,7 @@
             <a:avLst/>
           </a:prstGeom>
           <a:solidFill>
-            <a:srgbClr val="2457D6"/>
+            <a:srgbClr val="1E7F5B"/>
           </a:solidFill>
           <a:ln>
             <a:noFill/>
@@ -21460,11 +21460,11 @@
             </a:avLst>
           </a:prstGeom>
           <a:solidFill>
-            <a:srgbClr val="F6F8FD"/>
+            <a:srgbClr val="F4F7FA"/>
           </a:solidFill>
           <a:ln w="9525">
             <a:solidFill>
-              <a:srgbClr val="DEE3F0"/>
+              <a:srgbClr val="D8E1EE"/>
             </a:solidFill>
           </a:ln>
           <a:effectLst/>
@@ -21492,7 +21492,7 @@
             <a:avLst/>
           </a:prstGeom>
           <a:solidFill>
-            <a:srgbClr val="1E2A6E"/>
+            <a:srgbClr val="1E3E69"/>
           </a:solidFill>
           <a:ln>
             <a:noFill/>
@@ -21622,7 +21622,7 @@
             <a:avLst/>
           </a:prstGeom>
           <a:solidFill>
-            <a:srgbClr val="DEE3F0"/>
+            <a:srgbClr val="D8E1EE"/>
           </a:solidFill>
           <a:ln>
             <a:noFill/>
@@ -21752,7 +21752,7 @@
             <a:avLst/>
           </a:prstGeom>
           <a:solidFill>
-            <a:srgbClr val="F4F6FC"/>
+            <a:srgbClr val="F3F8F6"/>
           </a:solidFill>
           <a:ln>
             <a:noFill/>
@@ -21812,7 +21812,7 @@
             <a:avLst/>
           </a:prstGeom>
           <a:solidFill>
-            <a:srgbClr val="F8F8FA"/>
+            <a:srgbClr val="F8F9FA"/>
           </a:solidFill>
           <a:ln>
             <a:noFill/>
@@ -21857,7 +21857,7 @@
             <a:r>
               <a:rPr sz="1950" b="1" spc="160">
                 <a:solidFill>
-                  <a:srgbClr val="2457D6"/>
+                  <a:srgbClr val="1E7F5B"/>
                 </a:solidFill>
                 <a:latin typeface="Pretendard"/>
                 <a:ea typeface="Pretendard"/>
@@ -21898,7 +21898,7 @@
             <a:r>
               <a:rPr sz="5100" b="1">
                 <a:solidFill>
-                  <a:srgbClr val="1E2A6E"/>
+                  <a:srgbClr val="1E3E69"/>
                 </a:solidFill>
                 <a:latin typeface="Pretendard"/>
                 <a:ea typeface="Pretendard"/>
@@ -21924,7 +21924,7 @@
             <a:avLst/>
           </a:prstGeom>
           <a:solidFill>
-            <a:srgbClr val="1E2A6E"/>
+            <a:srgbClr val="1E3E69"/>
           </a:solidFill>
           <a:ln>
             <a:noFill/>
@@ -21956,11 +21956,11 @@
             </a:avLst>
           </a:prstGeom>
           <a:solidFill>
-            <a:srgbClr val="F6F8FD"/>
+            <a:srgbClr val="F4F7FA"/>
           </a:solidFill>
           <a:ln w="9525">
             <a:solidFill>
-              <a:srgbClr val="DEE3F0"/>
+              <a:srgbClr val="D8E1EE"/>
             </a:solidFill>
           </a:ln>
           <a:effectLst/>
@@ -21988,7 +21988,7 @@
             <a:avLst/>
           </a:prstGeom>
           <a:solidFill>
-            <a:srgbClr val="1E2A6E"/>
+            <a:srgbClr val="1E3E69"/>
           </a:solidFill>
           <a:ln>
             <a:noFill/>
@@ -22074,7 +22074,7 @@
             <a:r>
               <a:rPr sz="2325" b="1">
                 <a:solidFill>
-                  <a:srgbClr val="1E2A6E"/>
+                  <a:srgbClr val="1E3E69"/>
                 </a:solidFill>
                 <a:latin typeface="Pretendard"/>
                 <a:ea typeface="Pretendard"/>
@@ -22102,11 +22102,11 @@
             </a:avLst>
           </a:prstGeom>
           <a:solidFill>
-            <a:srgbClr val="F6F8FD"/>
+            <a:srgbClr val="F4F7FA"/>
           </a:solidFill>
           <a:ln w="9525">
             <a:solidFill>
-              <a:srgbClr val="DEE3F0"/>
+              <a:srgbClr val="D8E1EE"/>
             </a:solidFill>
           </a:ln>
           <a:effectLst/>
@@ -22134,7 +22134,7 @@
             <a:avLst/>
           </a:prstGeom>
           <a:solidFill>
-            <a:srgbClr val="1E2A6E"/>
+            <a:srgbClr val="1E3E69"/>
           </a:solidFill>
           <a:ln>
             <a:noFill/>
@@ -22220,7 +22220,7 @@
             <a:r>
               <a:rPr sz="2325" b="1">
                 <a:solidFill>
-                  <a:srgbClr val="1E2A6E"/>
+                  <a:srgbClr val="1E3E69"/>
                 </a:solidFill>
                 <a:latin typeface="Pretendard"/>
                 <a:ea typeface="Pretendard"/>
@@ -22248,11 +22248,11 @@
             </a:avLst>
           </a:prstGeom>
           <a:solidFill>
-            <a:srgbClr val="F6F8FD"/>
+            <a:srgbClr val="F4F7FA"/>
           </a:solidFill>
           <a:ln w="9525">
             <a:solidFill>
-              <a:srgbClr val="DEE3F0"/>
+              <a:srgbClr val="D8E1EE"/>
             </a:solidFill>
           </a:ln>
           <a:effectLst/>
@@ -22280,7 +22280,7 @@
             <a:avLst/>
           </a:prstGeom>
           <a:solidFill>
-            <a:srgbClr val="1E2A6E"/>
+            <a:srgbClr val="1E3E69"/>
           </a:solidFill>
           <a:ln>
             <a:noFill/>
@@ -22366,7 +22366,7 @@
             <a:r>
               <a:rPr sz="2325" b="1">
                 <a:solidFill>
-                  <a:srgbClr val="1E2A6E"/>
+                  <a:srgbClr val="1E3E69"/>
                 </a:solidFill>
                 <a:latin typeface="Pretendard"/>
                 <a:ea typeface="Pretendard"/>
@@ -22394,11 +22394,11 @@
             </a:avLst>
           </a:prstGeom>
           <a:solidFill>
-            <a:srgbClr val="F6F8FD"/>
+            <a:srgbClr val="F4F7FA"/>
           </a:solidFill>
           <a:ln w="9525">
             <a:solidFill>
-              <a:srgbClr val="DEE3F0"/>
+              <a:srgbClr val="D8E1EE"/>
             </a:solidFill>
           </a:ln>
           <a:effectLst/>
@@ -22426,7 +22426,7 @@
             <a:avLst/>
           </a:prstGeom>
           <a:solidFill>
-            <a:srgbClr val="1E2A6E"/>
+            <a:srgbClr val="1E3E69"/>
           </a:solidFill>
           <a:ln>
             <a:noFill/>
@@ -22512,7 +22512,7 @@
             <a:r>
               <a:rPr sz="2325" b="1">
                 <a:solidFill>
-                  <a:srgbClr val="1E2A6E"/>
+                  <a:srgbClr val="1E3E69"/>
                 </a:solidFill>
                 <a:latin typeface="Pretendard"/>
                 <a:ea typeface="Pretendard"/>
@@ -22540,11 +22540,11 @@
             </a:avLst>
           </a:prstGeom>
           <a:solidFill>
-            <a:srgbClr val="EAF0FF"/>
+            <a:srgbClr val="E6F4EE"/>
           </a:solidFill>
           <a:ln w="9525">
             <a:solidFill>
-              <a:srgbClr val="C9D7FF"/>
+              <a:srgbClr val="C3E6D8"/>
             </a:solidFill>
           </a:ln>
           <a:effectLst/>
@@ -22587,7 +22587,7 @@
             <a:r>
               <a:rPr sz="2475" b="1">
                 <a:solidFill>
-                  <a:srgbClr val="1E2A6E"/>
+                  <a:srgbClr val="1E3E69"/>
                 </a:solidFill>
                 <a:latin typeface="Pretendard"/>
                 <a:ea typeface="Pretendard"/>
@@ -22613,7 +22613,7 @@
             <a:avLst/>
           </a:prstGeom>
           <a:solidFill>
-            <a:srgbClr val="DEE3F0"/>
+            <a:srgbClr val="D8E1EE"/>
           </a:solidFill>
           <a:ln>
             <a:noFill/>
@@ -22743,7 +22743,7 @@
             <a:avLst/>
           </a:prstGeom>
           <a:solidFill>
-            <a:srgbClr val="F4F6FC"/>
+            <a:srgbClr val="F3F8F6"/>
           </a:solidFill>
           <a:ln>
             <a:noFill/>
@@ -22803,7 +22803,7 @@
             <a:avLst/>
           </a:prstGeom>
           <a:solidFill>
-            <a:srgbClr val="F8F8FA"/>
+            <a:srgbClr val="F8F9FA"/>
           </a:solidFill>
           <a:ln>
             <a:noFill/>
@@ -22848,7 +22848,7 @@
             <a:r>
               <a:rPr sz="1950" b="1" spc="160">
                 <a:solidFill>
-                  <a:srgbClr val="2457D6"/>
+                  <a:srgbClr val="1E7F5B"/>
                 </a:solidFill>
                 <a:latin typeface="Pretendard"/>
                 <a:ea typeface="Pretendard"/>
@@ -22889,7 +22889,7 @@
             <a:r>
               <a:rPr sz="5100" b="1">
                 <a:solidFill>
-                  <a:srgbClr val="1E2A6E"/>
+                  <a:srgbClr val="1E3E69"/>
                 </a:solidFill>
                 <a:latin typeface="Pretendard"/>
                 <a:ea typeface="Pretendard"/>
@@ -22915,7 +22915,7 @@
             <a:avLst/>
           </a:prstGeom>
           <a:solidFill>
-            <a:srgbClr val="1E2A6E"/>
+            <a:srgbClr val="1E3E69"/>
           </a:solidFill>
           <a:ln>
             <a:noFill/>
@@ -22947,11 +22947,11 @@
             </a:avLst>
           </a:prstGeom>
           <a:solidFill>
-            <a:srgbClr val="F6F8FD"/>
+            <a:srgbClr val="F4F7FA"/>
           </a:solidFill>
           <a:ln w="9525">
             <a:solidFill>
-              <a:srgbClr val="DEE3F0"/>
+              <a:srgbClr val="D8E1EE"/>
             </a:solidFill>
           </a:ln>
           <a:effectLst/>
@@ -22979,7 +22979,7 @@
             <a:avLst/>
           </a:prstGeom>
           <a:solidFill>
-            <a:srgbClr val="2457D6"/>
+            <a:srgbClr val="1E7F5B"/>
           </a:solidFill>
           <a:ln>
             <a:noFill/>
@@ -23065,7 +23065,7 @@
             <a:r>
               <a:rPr sz="2700" b="1">
                 <a:solidFill>
-                  <a:srgbClr val="1E2A6E"/>
+                  <a:srgbClr val="1E3E69"/>
                 </a:solidFill>
                 <a:latin typeface="Pretendard"/>
                 <a:ea typeface="Pretendard"/>
@@ -23132,11 +23132,11 @@
             </a:avLst>
           </a:prstGeom>
           <a:solidFill>
-            <a:srgbClr val="F6F8FD"/>
+            <a:srgbClr val="F4F7FA"/>
           </a:solidFill>
           <a:ln w="9525">
             <a:solidFill>
-              <a:srgbClr val="DEE3F0"/>
+              <a:srgbClr val="D8E1EE"/>
             </a:solidFill>
           </a:ln>
           <a:effectLst/>
@@ -23164,7 +23164,7 @@
             <a:avLst/>
           </a:prstGeom>
           <a:solidFill>
-            <a:srgbClr val="2457D6"/>
+            <a:srgbClr val="1E7F5B"/>
           </a:solidFill>
           <a:ln>
             <a:noFill/>
@@ -23250,7 +23250,7 @@
             <a:r>
               <a:rPr sz="2700" b="1">
                 <a:solidFill>
-                  <a:srgbClr val="1E2A6E"/>
+                  <a:srgbClr val="1E3E69"/>
                 </a:solidFill>
                 <a:latin typeface="Pretendard"/>
                 <a:ea typeface="Pretendard"/>
@@ -23317,11 +23317,11 @@
             </a:avLst>
           </a:prstGeom>
           <a:solidFill>
-            <a:srgbClr val="F6F8FD"/>
+            <a:srgbClr val="F4F7FA"/>
           </a:solidFill>
           <a:ln w="9525">
             <a:solidFill>
-              <a:srgbClr val="DEE3F0"/>
+              <a:srgbClr val="D8E1EE"/>
             </a:solidFill>
           </a:ln>
           <a:effectLst/>
@@ -23349,7 +23349,7 @@
             <a:avLst/>
           </a:prstGeom>
           <a:solidFill>
-            <a:srgbClr val="2457D6"/>
+            <a:srgbClr val="1E7F5B"/>
           </a:solidFill>
           <a:ln>
             <a:noFill/>
@@ -23435,7 +23435,7 @@
             <a:r>
               <a:rPr sz="2700" b="1">
                 <a:solidFill>
-                  <a:srgbClr val="1E2A6E"/>
+                  <a:srgbClr val="1E3E69"/>
                 </a:solidFill>
                 <a:latin typeface="Pretendard"/>
                 <a:ea typeface="Pretendard"/>
@@ -23502,11 +23502,11 @@
             </a:avLst>
           </a:prstGeom>
           <a:solidFill>
-            <a:srgbClr val="F6F8FD"/>
+            <a:srgbClr val="F4F7FA"/>
           </a:solidFill>
           <a:ln w="9525">
             <a:solidFill>
-              <a:srgbClr val="DEE3F0"/>
+              <a:srgbClr val="D8E1EE"/>
             </a:solidFill>
           </a:ln>
           <a:effectLst/>
@@ -23534,7 +23534,7 @@
             <a:avLst/>
           </a:prstGeom>
           <a:solidFill>
-            <a:srgbClr val="2457D6"/>
+            <a:srgbClr val="1E7F5B"/>
           </a:solidFill>
           <a:ln>
             <a:noFill/>
@@ -23620,7 +23620,7 @@
             <a:r>
               <a:rPr sz="2700" b="1">
                 <a:solidFill>
-                  <a:srgbClr val="1E2A6E"/>
+                  <a:srgbClr val="1E3E69"/>
                 </a:solidFill>
                 <a:latin typeface="Pretendard"/>
                 <a:ea typeface="Pretendard"/>
@@ -23685,7 +23685,7 @@
             <a:avLst/>
           </a:prstGeom>
           <a:solidFill>
-            <a:srgbClr val="DEE3F0"/>
+            <a:srgbClr val="D8E1EE"/>
           </a:solidFill>
           <a:ln>
             <a:noFill/>
@@ -23815,7 +23815,7 @@
             <a:avLst/>
           </a:prstGeom>
           <a:solidFill>
-            <a:srgbClr val="F4F6FC"/>
+            <a:srgbClr val="F3F8F6"/>
           </a:solidFill>
           <a:ln>
             <a:noFill/>
@@ -23845,7 +23845,7 @@
             <a:avLst/>
           </a:prstGeom>
           <a:solidFill>
-            <a:srgbClr val="F6F6F9"/>
+            <a:srgbClr val="F6F7F9"/>
           </a:solidFill>
           <a:ln>
             <a:noFill/>
@@ -23875,7 +23875,7 @@
             <a:avLst/>
           </a:prstGeom>
           <a:solidFill>
-            <a:srgbClr val="1E2A6E"/>
+            <a:srgbClr val="1E3E69"/>
           </a:solidFill>
           <a:ln>
             <a:noFill/>
@@ -23920,7 +23920,7 @@
             <a:r>
               <a:rPr sz="2400" b="1">
                 <a:solidFill>
-                  <a:srgbClr val="2457D6"/>
+                  <a:srgbClr val="1E7F5B"/>
                 </a:solidFill>
                 <a:latin typeface="Pretendard"/>
                 <a:ea typeface="Pretendard"/>
@@ -23961,7 +23961,7 @@
             <a:r>
               <a:rPr sz="6600" b="1">
                 <a:solidFill>
-                  <a:srgbClr val="1E2A6E"/>
+                  <a:srgbClr val="1E3E69"/>
                 </a:solidFill>
                 <a:latin typeface="Pretendard"/>
                 <a:ea typeface="Pretendard"/>
@@ -24028,7 +24028,7 @@
             <a:avLst/>
           </a:prstGeom>
           <a:solidFill>
-            <a:srgbClr val="DEE3F0"/>
+            <a:srgbClr val="D8E1EE"/>
           </a:solidFill>
           <a:ln>
             <a:noFill/>
@@ -24158,7 +24158,7 @@
             <a:avLst/>
           </a:prstGeom>
           <a:solidFill>
-            <a:srgbClr val="F4F6FC"/>
+            <a:srgbClr val="F3F8F6"/>
           </a:solidFill>
           <a:ln>
             <a:noFill/>
@@ -24218,7 +24218,7 @@
             <a:avLst/>
           </a:prstGeom>
           <a:solidFill>
-            <a:srgbClr val="F8F8FA"/>
+            <a:srgbClr val="F8F9FA"/>
           </a:solidFill>
           <a:ln>
             <a:noFill/>
@@ -24263,7 +24263,7 @@
             <a:r>
               <a:rPr sz="1950" b="1" spc="160">
                 <a:solidFill>
-                  <a:srgbClr val="2457D6"/>
+                  <a:srgbClr val="1E7F5B"/>
                 </a:solidFill>
                 <a:latin typeface="Pretendard"/>
                 <a:ea typeface="Pretendard"/>
@@ -24304,7 +24304,7 @@
             <a:r>
               <a:rPr sz="5100" b="1">
                 <a:solidFill>
-                  <a:srgbClr val="1E2A6E"/>
+                  <a:srgbClr val="1E3E69"/>
                 </a:solidFill>
                 <a:latin typeface="Pretendard"/>
                 <a:ea typeface="Pretendard"/>
@@ -24330,7 +24330,7 @@
             <a:avLst/>
           </a:prstGeom>
           <a:solidFill>
-            <a:srgbClr val="1E2A6E"/>
+            <a:srgbClr val="1E3E69"/>
           </a:solidFill>
           <a:ln>
             <a:noFill/>
@@ -24362,11 +24362,11 @@
             </a:avLst>
           </a:prstGeom>
           <a:solidFill>
-            <a:srgbClr val="F6F8FD"/>
+            <a:srgbClr val="F4F7FA"/>
           </a:solidFill>
           <a:ln w="9525">
             <a:solidFill>
-              <a:srgbClr val="DEE3F0"/>
+              <a:srgbClr val="D8E1EE"/>
             </a:solidFill>
           </a:ln>
           <a:effectLst/>
@@ -24394,7 +24394,7 @@
             <a:avLst/>
           </a:prstGeom>
           <a:solidFill>
-            <a:srgbClr val="2457D6"/>
+            <a:srgbClr val="1E7F5B"/>
           </a:solidFill>
           <a:ln>
             <a:noFill/>
@@ -24480,7 +24480,7 @@
             <a:r>
               <a:rPr sz="3150" b="1">
                 <a:solidFill>
-                  <a:srgbClr val="1E2A6E"/>
+                  <a:srgbClr val="1E3E69"/>
                 </a:solidFill>
                 <a:latin typeface="Pretendard"/>
                 <a:ea typeface="Pretendard"/>
@@ -24547,11 +24547,11 @@
             </a:avLst>
           </a:prstGeom>
           <a:solidFill>
-            <a:srgbClr val="1E2A6E"/>
+            <a:srgbClr val="1E3E69"/>
           </a:solidFill>
           <a:ln w="9525">
             <a:solidFill>
-              <a:srgbClr val="1E2A6E"/>
+              <a:srgbClr val="1E3E69"/>
             </a:solidFill>
           </a:ln>
           <a:effectLst/>
@@ -24579,7 +24579,7 @@
             <a:avLst/>
           </a:prstGeom>
           <a:solidFill>
-            <a:srgbClr val="2457D6"/>
+            <a:srgbClr val="1E7F5B"/>
           </a:solidFill>
           <a:ln>
             <a:noFill/>
@@ -24750,11 +24750,11 @@
             </a:avLst>
           </a:prstGeom>
           <a:solidFill>
-            <a:srgbClr val="F6F8FD"/>
+            <a:srgbClr val="F4F7FA"/>
           </a:solidFill>
           <a:ln w="9525">
             <a:solidFill>
-              <a:srgbClr val="DEE3F0"/>
+              <a:srgbClr val="D8E1EE"/>
             </a:solidFill>
           </a:ln>
           <a:effectLst/>
@@ -24782,7 +24782,7 @@
             <a:avLst/>
           </a:prstGeom>
           <a:solidFill>
-            <a:srgbClr val="2457D6"/>
+            <a:srgbClr val="1E7F5B"/>
           </a:solidFill>
           <a:ln>
             <a:noFill/>
@@ -24868,7 +24868,7 @@
             <a:r>
               <a:rPr sz="3150" b="1">
                 <a:solidFill>
-                  <a:srgbClr val="1E2A6E"/>
+                  <a:srgbClr val="1E3E69"/>
                 </a:solidFill>
                 <a:latin typeface="Pretendard"/>
                 <a:ea typeface="Pretendard"/>
@@ -24933,7 +24933,7 @@
             <a:avLst/>
           </a:prstGeom>
           <a:solidFill>
-            <a:srgbClr val="DEE3F0"/>
+            <a:srgbClr val="D8E1EE"/>
           </a:solidFill>
           <a:ln>
             <a:noFill/>
@@ -25063,7 +25063,7 @@
             <a:avLst/>
           </a:prstGeom>
           <a:solidFill>
-            <a:srgbClr val="F4F6FC"/>
+            <a:srgbClr val="F3F8F6"/>
           </a:solidFill>
           <a:ln>
             <a:noFill/>
@@ -25123,7 +25123,7 @@
             <a:avLst/>
           </a:prstGeom>
           <a:solidFill>
-            <a:srgbClr val="F8F8FA"/>
+            <a:srgbClr val="F8F9FA"/>
           </a:solidFill>
           <a:ln>
             <a:noFill/>
@@ -25168,7 +25168,7 @@
             <a:r>
               <a:rPr sz="1950" b="1" spc="160">
                 <a:solidFill>
-                  <a:srgbClr val="2457D6"/>
+                  <a:srgbClr val="1E7F5B"/>
                 </a:solidFill>
                 <a:latin typeface="Pretendard"/>
                 <a:ea typeface="Pretendard"/>
@@ -25209,7 +25209,7 @@
             <a:r>
               <a:rPr sz="5100" b="1">
                 <a:solidFill>
-                  <a:srgbClr val="1E2A6E"/>
+                  <a:srgbClr val="1E3E69"/>
                 </a:solidFill>
                 <a:latin typeface="Pretendard"/>
                 <a:ea typeface="Pretendard"/>
@@ -25235,7 +25235,7 @@
             <a:avLst/>
           </a:prstGeom>
           <a:solidFill>
-            <a:srgbClr val="1E2A6E"/>
+            <a:srgbClr val="1E3E69"/>
           </a:solidFill>
           <a:ln>
             <a:noFill/>
@@ -25280,7 +25280,7 @@
             <a:r>
               <a:rPr sz="3150" b="1">
                 <a:solidFill>
-                  <a:srgbClr val="1E2A6E"/>
+                  <a:srgbClr val="1E3E69"/>
                 </a:solidFill>
                 <a:latin typeface="Pretendard"/>
                 <a:ea typeface="Pretendard"/>
@@ -25349,11 +25349,11 @@
             </a:avLst>
           </a:prstGeom>
           <a:solidFill>
-            <a:srgbClr val="F6F8FD"/>
+            <a:srgbClr val="F4F7FA"/>
           </a:solidFill>
           <a:ln w="9525">
             <a:solidFill>
-              <a:srgbClr val="DEE3F0"/>
+              <a:srgbClr val="D8E1EE"/>
             </a:solidFill>
           </a:ln>
           <a:effectLst/>
@@ -25381,7 +25381,7 @@
             <a:avLst/>
           </a:prstGeom>
           <a:solidFill>
-            <a:srgbClr val="2457D6"/>
+            <a:srgbClr val="1E7F5B"/>
           </a:solidFill>
           <a:ln>
             <a:noFill/>
@@ -25452,7 +25452,7 @@
             <a:avLst/>
           </a:prstGeom>
           <a:solidFill>
-            <a:srgbClr val="2457D6"/>
+            <a:srgbClr val="1E7F5B"/>
           </a:solidFill>
           <a:ln>
             <a:noFill/>
@@ -25523,7 +25523,7 @@
             <a:avLst/>
           </a:prstGeom>
           <a:solidFill>
-            <a:srgbClr val="2457D6"/>
+            <a:srgbClr val="1E7F5B"/>
           </a:solidFill>
           <a:ln>
             <a:noFill/>
@@ -25609,7 +25609,7 @@
             <a:r>
               <a:rPr sz="3150" b="1">
                 <a:solidFill>
-                  <a:srgbClr val="1E2A6E"/>
+                  <a:srgbClr val="1E3E69"/>
                 </a:solidFill>
                 <a:latin typeface="Pretendard"/>
                 <a:ea typeface="Pretendard"/>
@@ -25678,11 +25678,11 @@
             </a:avLst>
           </a:prstGeom>
           <a:solidFill>
-            <a:srgbClr val="F6F8FD"/>
+            <a:srgbClr val="F4F7FA"/>
           </a:solidFill>
           <a:ln w="9525">
             <a:solidFill>
-              <a:srgbClr val="DEE3F0"/>
+              <a:srgbClr val="D8E1EE"/>
             </a:solidFill>
           </a:ln>
           <a:effectLst/>
@@ -25710,7 +25710,7 @@
             <a:avLst/>
           </a:prstGeom>
           <a:solidFill>
-            <a:srgbClr val="2457D6"/>
+            <a:srgbClr val="1E7F5B"/>
           </a:solidFill>
           <a:ln>
             <a:noFill/>
@@ -25781,7 +25781,7 @@
             <a:avLst/>
           </a:prstGeom>
           <a:solidFill>
-            <a:srgbClr val="2457D6"/>
+            <a:srgbClr val="1E7F5B"/>
           </a:solidFill>
           <a:ln>
             <a:noFill/>
@@ -25852,7 +25852,7 @@
             <a:avLst/>
           </a:prstGeom>
           <a:solidFill>
-            <a:srgbClr val="2457D6"/>
+            <a:srgbClr val="1E7F5B"/>
           </a:solidFill>
           <a:ln>
             <a:noFill/>
@@ -25923,7 +25923,7 @@
             <a:avLst/>
           </a:prstGeom>
           <a:solidFill>
-            <a:srgbClr val="1E2A6E"/>
+            <a:srgbClr val="1E3E69"/>
           </a:solidFill>
           <a:ln>
             <a:noFill/>
@@ -25994,7 +25994,7 @@
             <a:avLst/>
           </a:prstGeom>
           <a:solidFill>
-            <a:srgbClr val="DEE3F0"/>
+            <a:srgbClr val="D8E1EE"/>
           </a:solidFill>
           <a:ln>
             <a:noFill/>
@@ -26124,7 +26124,7 @@
             <a:avLst/>
           </a:prstGeom>
           <a:solidFill>
-            <a:srgbClr val="F4F6FC"/>
+            <a:srgbClr val="F3F8F6"/>
           </a:solidFill>
           <a:ln>
             <a:noFill/>
@@ -26184,7 +26184,7 @@
             <a:avLst/>
           </a:prstGeom>
           <a:solidFill>
-            <a:srgbClr val="F8F8FA"/>
+            <a:srgbClr val="F8F9FA"/>
           </a:solidFill>
           <a:ln>
             <a:noFill/>
@@ -26229,7 +26229,7 @@
             <a:r>
               <a:rPr sz="1950" b="1" spc="160">
                 <a:solidFill>
-                  <a:srgbClr val="2457D6"/>
+                  <a:srgbClr val="1E7F5B"/>
                 </a:solidFill>
                 <a:latin typeface="Pretendard"/>
                 <a:ea typeface="Pretendard"/>
@@ -26270,7 +26270,7 @@
             <a:r>
               <a:rPr sz="5100" b="1">
                 <a:solidFill>
-                  <a:srgbClr val="1E2A6E"/>
+                  <a:srgbClr val="1E3E69"/>
                 </a:solidFill>
                 <a:latin typeface="Pretendard"/>
                 <a:ea typeface="Pretendard"/>
@@ -26296,7 +26296,7 @@
             <a:avLst/>
           </a:prstGeom>
           <a:solidFill>
-            <a:srgbClr val="1E2A6E"/>
+            <a:srgbClr val="1E3E69"/>
           </a:solidFill>
           <a:ln>
             <a:noFill/>
@@ -26328,11 +26328,11 @@
             </a:avLst>
           </a:prstGeom>
           <a:solidFill>
-            <a:srgbClr val="F6F8FD"/>
+            <a:srgbClr val="F4F7FA"/>
           </a:solidFill>
           <a:ln w="9525">
             <a:solidFill>
-              <a:srgbClr val="DEE3F0"/>
+              <a:srgbClr val="D8E1EE"/>
             </a:solidFill>
           </a:ln>
           <a:effectLst/>
@@ -26360,7 +26360,7 @@
             <a:avLst/>
           </a:prstGeom>
           <a:solidFill>
-            <a:srgbClr val="1E2A6E"/>
+            <a:srgbClr val="1E3E69"/>
           </a:solidFill>
           <a:ln>
             <a:noFill/>
@@ -26446,7 +26446,7 @@
             <a:r>
               <a:rPr sz="2100" b="1">
                 <a:solidFill>
-                  <a:srgbClr val="1E2A6E"/>
+                  <a:srgbClr val="1E3E69"/>
                 </a:solidFill>
                 <a:latin typeface="Pretendard"/>
                 <a:ea typeface="Pretendard"/>
@@ -26474,11 +26474,11 @@
             </a:avLst>
           </a:prstGeom>
           <a:solidFill>
-            <a:srgbClr val="F6F8FD"/>
+            <a:srgbClr val="F4F7FA"/>
           </a:solidFill>
           <a:ln w="9525">
             <a:solidFill>
-              <a:srgbClr val="DEE3F0"/>
+              <a:srgbClr val="D8E1EE"/>
             </a:solidFill>
           </a:ln>
           <a:effectLst/>
@@ -26506,7 +26506,7 @@
             <a:avLst/>
           </a:prstGeom>
           <a:solidFill>
-            <a:srgbClr val="1E2A6E"/>
+            <a:srgbClr val="1E3E69"/>
           </a:solidFill>
           <a:ln>
             <a:noFill/>
@@ -26592,7 +26592,7 @@
             <a:r>
               <a:rPr sz="2100" b="1">
                 <a:solidFill>
-                  <a:srgbClr val="1E2A6E"/>
+                  <a:srgbClr val="1E3E69"/>
                 </a:solidFill>
                 <a:latin typeface="Pretendard"/>
                 <a:ea typeface="Pretendard"/>
@@ -26620,11 +26620,11 @@
             </a:avLst>
           </a:prstGeom>
           <a:solidFill>
-            <a:srgbClr val="F6F8FD"/>
+            <a:srgbClr val="F4F7FA"/>
           </a:solidFill>
           <a:ln w="9525">
             <a:solidFill>
-              <a:srgbClr val="DEE3F0"/>
+              <a:srgbClr val="D8E1EE"/>
             </a:solidFill>
           </a:ln>
           <a:effectLst/>
@@ -26652,7 +26652,7 @@
             <a:avLst/>
           </a:prstGeom>
           <a:solidFill>
-            <a:srgbClr val="1E2A6E"/>
+            <a:srgbClr val="1E3E69"/>
           </a:solidFill>
           <a:ln>
             <a:noFill/>
@@ -26738,7 +26738,7 @@
             <a:r>
               <a:rPr sz="2100" b="1">
                 <a:solidFill>
-                  <a:srgbClr val="1E2A6E"/>
+                  <a:srgbClr val="1E3E69"/>
                 </a:solidFill>
                 <a:latin typeface="Pretendard"/>
                 <a:ea typeface="Pretendard"/>
@@ -26766,11 +26766,11 @@
             </a:avLst>
           </a:prstGeom>
           <a:solidFill>
-            <a:srgbClr val="F6F8FD"/>
+            <a:srgbClr val="F4F7FA"/>
           </a:solidFill>
           <a:ln w="9525">
             <a:solidFill>
-              <a:srgbClr val="DEE3F0"/>
+              <a:srgbClr val="D8E1EE"/>
             </a:solidFill>
           </a:ln>
           <a:effectLst/>
@@ -26798,7 +26798,7 @@
             <a:avLst/>
           </a:prstGeom>
           <a:solidFill>
-            <a:srgbClr val="1E2A6E"/>
+            <a:srgbClr val="1E3E69"/>
           </a:solidFill>
           <a:ln>
             <a:noFill/>
@@ -26884,7 +26884,7 @@
             <a:r>
               <a:rPr sz="2100" b="1">
                 <a:solidFill>
-                  <a:srgbClr val="1E2A6E"/>
+                  <a:srgbClr val="1E3E69"/>
                 </a:solidFill>
                 <a:latin typeface="Pretendard"/>
                 <a:ea typeface="Pretendard"/>
@@ -26912,11 +26912,11 @@
             </a:avLst>
           </a:prstGeom>
           <a:solidFill>
-            <a:srgbClr val="F6F8FD"/>
+            <a:srgbClr val="F4F7FA"/>
           </a:solidFill>
           <a:ln w="9525">
             <a:solidFill>
-              <a:srgbClr val="DEE3F0"/>
+              <a:srgbClr val="D8E1EE"/>
             </a:solidFill>
           </a:ln>
           <a:effectLst/>
@@ -26944,7 +26944,7 @@
             <a:avLst/>
           </a:prstGeom>
           <a:solidFill>
-            <a:srgbClr val="1E2A6E"/>
+            <a:srgbClr val="1E3E69"/>
           </a:solidFill>
           <a:ln>
             <a:noFill/>
@@ -27030,7 +27030,7 @@
             <a:r>
               <a:rPr sz="2100" b="1">
                 <a:solidFill>
-                  <a:srgbClr val="1E2A6E"/>
+                  <a:srgbClr val="1E3E69"/>
                 </a:solidFill>
                 <a:latin typeface="Pretendard"/>
                 <a:ea typeface="Pretendard"/>
@@ -27058,11 +27058,11 @@
             </a:avLst>
           </a:prstGeom>
           <a:solidFill>
-            <a:srgbClr val="EAF0FF"/>
+            <a:srgbClr val="E6F4EE"/>
           </a:solidFill>
           <a:ln w="9525">
             <a:solidFill>
-              <a:srgbClr val="C9D7FF"/>
+              <a:srgbClr val="C3E6D8"/>
             </a:solidFill>
           </a:ln>
           <a:effectLst/>
@@ -27105,7 +27105,7 @@
             <a:r>
               <a:rPr sz="2475" b="1">
                 <a:solidFill>
-                  <a:srgbClr val="1E2A6E"/>
+                  <a:srgbClr val="1E3E69"/>
                 </a:solidFill>
                 <a:latin typeface="Pretendard"/>
                 <a:ea typeface="Pretendard"/>
@@ -27131,7 +27131,7 @@
             <a:avLst/>
           </a:prstGeom>
           <a:solidFill>
-            <a:srgbClr val="DEE3F0"/>
+            <a:srgbClr val="D8E1EE"/>
           </a:solidFill>
           <a:ln>
             <a:noFill/>
